--- a/samples/회사보고자료_예시_마킹결과.pptx
+++ b/samples/회사보고자료_예시_마킹결과.pptx
@@ -903,14 +903,6 @@
               <a:t xml:space="preserve">일부 내용은 이미 외부에 공개된 이력이 있음</a:t>
             </a:r>
             <a:r>
-              <a:rPr lang="en-US" sz="900" b="1" u="none">
-                <a:solidFill>
-                  <a:srgbClr val="C62828"/>
-                </a:solidFill>
-              </a:rPr>
-              <a:t xml:space="preserve"> 【특허검토필요】</a:t>
-            </a:r>
-            <a:r>
               <a:rPr lang="en-US" dirty="0"/>
               <a:t xml:space="preserve">(슬라이드 5 참조).</a:t>
             </a:r>
@@ -920,7 +912,7 @@
           <a:p>
             <a:r>
               <a:rPr sz="1000"/>
-              <a:t>━━━━━━ 특허 검토 마킹 (자동 생성) ━━━━━━</a:t>
+              <a:t>━━━━━━ 출원 검토 마킹 (자동 생성) ━━━━━━</a:t>
             </a:r>
           </a:p>
           <a:p>
@@ -975,7 +967,7 @@
           <a:p>
             <a:r>
               <a:rPr sz="1000"/>
-              <a:t>  【특허검토필요】 문구가 붙은 곳이 마킹 구간입니다.</a:t>
+              <a:t>  형광펜(밑줄) 구간이 출원 검토가 필요한 곳입니다. 색 안내는 첫 슬라이드의 범례 상자에 있습니다.</a:t>
             </a:r>
           </a:p>
           <a:p/>
@@ -1091,14 +1083,6 @@
               <a:t xml:space="preserve">광학 모듈 원가 절감 효과</a:t>
             </a:r>
             <a:r>
-              <a:rPr lang="en-US" sz="900" b="1" u="none">
-                <a:solidFill>
-                  <a:srgbClr val="C62828"/>
-                </a:solidFill>
-              </a:rPr>
-              <a:t xml:space="preserve"> 【특허검토필요】</a:t>
-            </a:r>
-            <a:r>
               <a:rPr lang="en-US" dirty="0"/>
               <a:t xml:space="preserve">에서 기인함.</a:t>
             </a:r>
@@ -1108,13 +1092,13 @@
           <a:p>
             <a:r>
               <a:rPr sz="1000"/>
-              <a:t>━━━━━━ 특허 검토 마킹 (자동 생성) ━━━━━━</a:t>
-            </a:r>
-          </a:p>
-          <a:p>
-            <a:r>
-              <a:rPr sz="1000"/>
-              <a:t>[B · 묵시 · 구성·구조] “조립·물류 장비 중심 구조에서 검사 솔루션 중심으로 이동 중”</a:t>
+              <a:t>━━━━━━ 출원 검토 마킹 (자동 생성) ━━━━━━</a:t>
+            </a:r>
+          </a:p>
+          <a:p>
+            <a:r>
+              <a:rPr sz="1000"/>
+              <a:t>[B · 묵시 · 구조] “조립·물류 장비 중심 구조에서 검사 솔루션 중심으로 이동 중”</a:t>
             </a:r>
           </a:p>
           <a:p>
@@ -1126,7 +1110,7 @@
           <a:p>
             <a:r>
               <a:rPr sz="1000"/>
-              <a:t>[B · 묵시 · ⚠공개 · 수치·범위한정] “검사 모듈 12조 공급 확정”</a:t>
+              <a:t>[B · 묵시 · ⚠공개 · 범위한정] “검사 모듈 12조 공급 확정”</a:t>
             </a:r>
           </a:p>
           <a:p>
@@ -1150,7 +1134,7 @@
           <a:p>
             <a:r>
               <a:rPr sz="1000"/>
-              <a:t>[B · 묵시 · 수치·범위한정] “광학 모듈 원가 절감 효과”</a:t>
+              <a:t>[B · 묵시 · 범위한정] “광학 모듈 원가 절감 효과”</a:t>
             </a:r>
           </a:p>
           <a:p>
@@ -1255,14 +1239,6 @@
               <a:t xml:space="preserve">캐스케이드 구조와 적응형 임계 방식은 사내 독자 설계이며 현재 논문·특허 등 공개 실적 없음.</a:t>
             </a:r>
             <a:r>
-              <a:rPr lang="en-US" sz="900" b="1" u="none">
-                <a:solidFill>
-                  <a:srgbClr val="C62828"/>
-                </a:solidFill>
-              </a:rPr>
-              <a:t xml:space="preserve"> 【특허검토필요】</a:t>
-            </a:r>
-            <a:r>
               <a:rPr lang="en-US" dirty="0"/>
               <a:t xml:space="preserve">
 합성 결함 증강 비율(1:200)은 3개월간 실험으로 도출한 값으로, 1:50 이하에서는 재현율이 급격히 저하됨.</a:t>
@@ -1273,13 +1249,13 @@
           <a:p>
             <a:r>
               <a:rPr sz="1000"/>
-              <a:t>━━━━━━ 특허 검토 마킹 (자동 생성) ━━━━━━</a:t>
-            </a:r>
-          </a:p>
-          <a:p>
-            <a:r>
-              <a:rPr sz="1000"/>
-              <a:t>[B · 묵시 · 제어·알고리즘] “실시간 전극 결함 검출 알고리즘”</a:t>
+              <a:t>━━━━━━ 출원 검토 마킹 (자동 생성) ━━━━━━</a:t>
+            </a:r>
+          </a:p>
+          <a:p>
+            <a:r>
+              <a:rPr sz="1000"/>
+              <a:t>[B · 묵시 · 알고리즘] “실시간 전극 결함 검출 알고리즘”</a:t>
             </a:r>
           </a:p>
           <a:p>
@@ -1291,7 +1267,7 @@
           <a:p>
             <a:r>
               <a:rPr sz="1000"/>
-              <a:t>[A · 구성·구조] “추론 부하를 2단계로 분리한 캐스케이드 구조를 신규 설계함”</a:t>
+              <a:t>[A · 구조] “추론 부하를 2단계로 분리한 캐스케이드 구조를 신규 설계함”</a:t>
             </a:r>
           </a:p>
           <a:p>
@@ -1303,7 +1279,7 @@
           <a:p>
             <a:r>
               <a:rPr sz="1000"/>
-              <a:t>[A · 제어·알고리즘] “1차 모델은 정상 판정에만 특화된 경량 CNN으로, 정상 프레임을 즉시 배제해 2차 모델의 입력량을 1/33로 축소”</a:t>
+              <a:t>[A · 알고리즘] “1차 모델은 정상 판정에만 특화된 경량 CNN으로, 정상 프레임을 즉시 배제해 2차 모델의 입력량을 1/33로 축소”</a:t>
             </a:r>
           </a:p>
           <a:p>
@@ -1315,7 +1291,7 @@
           <a:p>
             <a:r>
               <a:rPr sz="1000"/>
-              <a:t>[A · 공정·방법] “결함 샘플 희소성 문제는 실 결함 1장당 합성 결함 200장을 생성하는 증강 파이프라인으로 보완 (결함 형태·위치·조도 랜덤화)”</a:t>
+              <a:t>[A · 방법] “결함 샘플 희소성 문제는 실 결함 1장당 합성 결함 200장을 생성하는 증강 파이프라인으로 보완 (결함 형태·위치·조도 랜덤화)”</a:t>
             </a:r>
           </a:p>
           <a:p>
@@ -1327,7 +1303,7 @@
           <a:p>
             <a:r>
               <a:rPr sz="1000"/>
-              <a:t>[B · 묵시 · 수치·범위한정] “라인 속도 120 m/min 조건에서 20㎛급 미세 결함까지 검출 가능”</a:t>
+              <a:t>[B · 묵시 · 범위한정] “라인 속도 120 m/min 조건에서 20㎛급 미세 결함까지 검출 가능”</a:t>
             </a:r>
           </a:p>
           <a:p>
@@ -1339,7 +1315,7 @@
           <a:p>
             <a:r>
               <a:rPr sz="1000"/>
-              <a:t>[A · 제어·알고리즘] “판정 임계값을 직전 500프레임의 결함 밀도에 따라 자동 조정하는 적응형 임계 방식 적용”</a:t>
+              <a:t>[A · 알고리즘] “판정 임계값을 직전 500프레임의 결함 밀도에 따라 자동 조정하는 적응형 임계 방식 적용”</a:t>
             </a:r>
           </a:p>
           <a:p>
@@ -1351,7 +1327,7 @@
           <a:p>
             <a:r>
               <a:rPr sz="1000"/>
-              <a:t>[B · 묵시 · 수치·범위한정] “4.2%   →   0.7%”</a:t>
+              <a:t>[B · 묵시 · 범위한정] “4.2%   →   0.7%”</a:t>
             </a:r>
           </a:p>
           <a:p>
@@ -1363,7 +1339,7 @@
           <a:p>
             <a:r>
               <a:rPr sz="1000"/>
-              <a:t>[B · 묵시 · 제어·알고리즘] “프레임당 추론 시간”</a:t>
+              <a:t>[B · 묵시 · 알고리즘] “프레임당 추론 시간”</a:t>
             </a:r>
           </a:p>
           <a:p>
@@ -1375,7 +1351,7 @@
           <a:p>
             <a:r>
               <a:rPr sz="1000"/>
-              <a:t>[B · 묵시 · 수치·범위한정] “38 ms   →   11 ms”</a:t>
+              <a:t>[B · 묵시 · 범위한정] “38 ms   →   11 ms”</a:t>
             </a:r>
           </a:p>
           <a:p>
@@ -1387,7 +1363,7 @@
           <a:p>
             <a:r>
               <a:rPr sz="1000"/>
-              <a:t>[B · 묵시 · 수치·범위한정] “1개   →   4개”</a:t>
+              <a:t>[B · 묵시 · 범위한정] “1개   →   4개”</a:t>
             </a:r>
           </a:p>
           <a:p>
@@ -1508,27 +1484,19 @@
               </a:rPr>
               <a:t xml:space="preserve">분광 프리즘 배치 구조는 협력사 도면이 아닌 자사 설계이며, 도면 일체를 사내에서 관리 중.</a:t>
             </a:r>
-            <a:r>
-              <a:rPr lang="en-US" sz="900" b="1" u="none">
-                <a:solidFill>
-                  <a:srgbClr val="C62828"/>
-                </a:solidFill>
-              </a:rPr>
-              <a:t xml:space="preserve"> 【특허검토필요】</a:t>
-            </a:r>
             <a:endParaRPr lang="en-US" dirty="0"/>
           </a:p>
           <a:p/>
           <a:p>
             <a:r>
               <a:rPr sz="1000"/>
-              <a:t>━━━━━━ 특허 검토 마킹 (자동 생성) ━━━━━━</a:t>
-            </a:r>
-          </a:p>
-          <a:p>
-            <a:r>
-              <a:rPr sz="1000"/>
-              <a:t>[B · 묵시 · 공정·방법] “광학 검사 모듈 및 공정 제어 개선”</a:t>
+              <a:t>━━━━━━ 출원 검토 마킹 (자동 생성) ━━━━━━</a:t>
+            </a:r>
+          </a:p>
+          <a:p>
+            <a:r>
+              <a:rPr sz="1000"/>
+              <a:t>[B · 묵시 · 방법] “광학 검사 모듈 및 공정 제어 개선”</a:t>
             </a:r>
           </a:p>
           <a:p>
@@ -1540,7 +1508,7 @@
           <a:p>
             <a:r>
               <a:rPr sz="1000"/>
-              <a:t>[A · 구성·구조] “450nm 청색광과 660nm 적색광을 200Hz로 교번 점등하고, 파장별 영상을 합성해 표면 결함과 내부 기공을 한 번의 스캔으로 동시 검출.”</a:t>
+              <a:t>[A · 구조] “450nm 청색광과 660nm 적색광을 200Hz로 교번 점등하고, 파장별 영상을 합성해 표면 결함과 내부 기공을 한 번의 스캔으로 동시 검출.”</a:t>
             </a:r>
           </a:p>
           <a:p>
@@ -1552,7 +1520,7 @@
           <a:p>
             <a:r>
               <a:rPr sz="1000"/>
-              <a:t>[B · 묵시 · 수치·범위한정] “조명 입사각을 22~28° 구간에서 가변한 결과 미세 크랙 대비비가 최대. 24°를 표준 사양으로 확정하고 각도 가변 마운트를 자체 제작.”</a:t>
+              <a:t>[B · 묵시 · 범위한정] “조명 입사각을 22~28° 구간에서 가변한 결과 미세 크랙 대비비가 최대. 24°를 표준 사양으로 확정하고 각도 가변 마운트를 자체 제작.”</a:t>
             </a:r>
           </a:p>
           <a:p>
@@ -1564,7 +1532,7 @@
           <a:p>
             <a:r>
               <a:rPr sz="1000"/>
-              <a:t>[B · 묵시 · 제어·알고리즘] “코팅 두께 실시간 피드백”</a:t>
+              <a:t>[B · 묵시 · 알고리즘] “코팅 두께 실시간 피드백”</a:t>
             </a:r>
           </a:p>
           <a:p>
@@ -1576,7 +1544,7 @@
           <a:p>
             <a:r>
               <a:rPr sz="1000"/>
-              <a:t>[B · 묵시 · 수치·범위한정] “검사 결과를 코터 슬롯다이 제어기에 200ms 주기로 반영하는 폐루프 구성. 두께 편차 ±0.8㎛ → ±0.3㎛로 축소.”</a:t>
+              <a:t>[B · 묵시 · 범위한정] “검사 결과를 코터 슬롯다이 제어기에 200ms 주기로 반영하는 폐루프 구성. 두께 편차 ±0.8㎛ → ±0.3㎛로 축소.”</a:t>
             </a:r>
           </a:p>
           <a:p>
@@ -1588,7 +1556,7 @@
           <a:p>
             <a:r>
               <a:rPr sz="1000"/>
-              <a:t>[B · 묵시 · 공정·방법] “모듈 원가 구조 개선”</a:t>
+              <a:t>[B · 묵시 · 방법] “모듈 원가 구조 개선”</a:t>
             </a:r>
           </a:p>
           <a:p>
@@ -1600,7 +1568,7 @@
           <a:p>
             <a:r>
               <a:rPr sz="1000"/>
-              <a:t>[A · 구성·구조] “라인스캔 카메라 4대 구성을 카메라 2대 + 분광 프리즘 구성으로 대체. 광학 모듈 원가 40% 절감, 설치 폭 320mm 축소.”</a:t>
+              <a:t>[A · 구조] “라인스캔 카메라 4대 구성을 카메라 2대 + 분광 프리즘 구성으로 대체. 광학 모듈 원가 40% 절감, 설치 폭 320mm 축소.”</a:t>
             </a:r>
           </a:p>
           <a:p>
@@ -1612,7 +1580,7 @@
           <a:p>
             <a:r>
               <a:rPr sz="1000"/>
-              <a:t>[B · 묵시 · 구성·구조] “광학 모듈 기준”</a:t>
+              <a:t>[B · 묵시 · 구조] “광학 모듈 기준”</a:t>
             </a:r>
           </a:p>
           <a:p>
@@ -1624,7 +1592,7 @@
           <a:p>
             <a:r>
               <a:rPr sz="1000"/>
-              <a:t>[B · 묵시 · 수치·범위한정] “기존 ±0.8㎛”</a:t>
+              <a:t>[B · 묵시 · 범위한정] “기존 ±0.8㎛”</a:t>
             </a:r>
           </a:p>
           <a:p>
@@ -1636,7 +1604,7 @@
           <a:p>
             <a:r>
               <a:rPr sz="1000"/>
-              <a:t>[B · 묵시 · 수치·범위한정] “△320mm”</a:t>
+              <a:t>[B · 묵시 · 범위한정] “△320mm”</a:t>
             </a:r>
           </a:p>
           <a:p>
@@ -1768,14 +1736,6 @@
               <a:t xml:space="preserve">학회 발표는 초록 제출 시점부터 공개로 간주될 수 있으므로, 출원 시점을 8월 중으로 앞당길 필요가 있는지 검토 요청.</a:t>
             </a:r>
             <a:r>
-              <a:rPr lang="en-US" sz="900" b="1" u="none">
-                <a:solidFill>
-                  <a:srgbClr val="C62828"/>
-                </a:solidFill>
-              </a:rPr>
-              <a:t xml:space="preserve"> 【특허검토필요】</a:t>
-            </a:r>
-            <a:r>
               <a:rPr lang="en-US" dirty="0"/>
               <a:t xml:space="preserve">
 InterBattery 시연은 이미 공개에 해당하므로 공지예외주장(신규성 의제) 적용 가능 기간을 확인해야 함.</a:t>
@@ -1786,7 +1746,7 @@
           <a:p>
             <a:r>
               <a:rPr sz="1000"/>
-              <a:t>━━━━━━ 특허 검토 마킹 (자동 생성) ━━━━━━</a:t>
+              <a:t>━━━━━━ 출원 검토 마킹 (자동 생성) ━━━━━━</a:t>
             </a:r>
           </a:p>
           <a:p>
@@ -2030,7 +1990,7 @@
           <a:p>
             <a:r>
               <a:rPr sz="1000"/>
-              <a:t>  【특허검토필요】 문구가 붙은 곳이 마킹 구간입니다.</a:t>
+              <a:t>  형광펜(밑줄) 구간이 출원 검토가 필요한 곳입니다. 색 안내는 첫 슬라이드의 범례 상자에 있습니다.</a:t>
             </a:r>
           </a:p>
           <a:p/>
@@ -2139,7 +2099,7 @@
           <a:p>
             <a:r>
               <a:rPr sz="1000"/>
-              <a:t>  【특허검토필요】 문구가 붙은 곳이 마킹 구간입니다.</a:t>
+              <a:t>  형광펜(밑줄) 구간이 출원 검토가 필요한 곳입니다. 색 안내는 첫 슬라이드의 범례 상자에 있습니다.</a:t>
             </a:r>
           </a:p>
           <a:p/>
@@ -2248,7 +2208,7 @@
           <a:p>
             <a:r>
               <a:rPr sz="1000"/>
-              <a:t>  【특허검토필요】 문구가 붙은 곳이 마킹 구간입니다.</a:t>
+              <a:t>  형광펜(밑줄) 구간이 출원 검토가 필요한 곳입니다. 색 안내는 첫 슬라이드의 범례 상자에 있습니다.</a:t>
             </a:r>
           </a:p>
           <a:p/>
@@ -2357,7 +2317,7 @@
           <a:p>
             <a:r>
               <a:rPr sz="1000"/>
-              <a:t>  【특허검토필요】 문구가 붙은 곳이 마킹 구간입니다.</a:t>
+              <a:t>  형광펜(밑줄) 구간이 출원 검토가 필요한 곳입니다. 색 안내는 첫 슬라이드의 범례 상자에 있습니다.</a:t>
             </a:r>
           </a:p>
           <a:p/>
@@ -3378,17 +3338,6 @@
               </a:rPr>
               <a:t>관련 기술 특허 출원</a:t>
             </a:r>
-            <a:r>
-              <a:rPr lang="en-US" sz="937" b="1" u="none">
-                <a:solidFill>
-                  <a:srgbClr val="C62828"/>
-                </a:solidFill>
-                <a:latin typeface="Malgun Gothic" pitchFamily="34" charset="0"/>
-                <a:ea typeface="Malgun Gothic" pitchFamily="34" charset="-122"/>
-                <a:cs typeface="Malgun Gothic" pitchFamily="34" charset="-120"/>
-              </a:rPr>
-              <a:t xml:space="preserve"> 【특허검토필요】</a:t>
-            </a:r>
             <a:endParaRPr lang="en-US" sz="1250" dirty="0"/>
           </a:p>
         </p:txBody>
@@ -3434,7 +3383,7 @@
       </p:sp>
       <p:sp>
         <p:nvSpPr>
-          <p:cNvPr id="21" name="특허검토필요 배지"/>
+          <p:cNvPr id="21" name="출원검토필요 배지"/>
           <p:cNvSpPr/>
           <p:nvPr/>
         </p:nvSpPr>
@@ -3479,7 +3428,164 @@
                   <a:srgbClr val="FFFFFF"/>
                 </a:solidFill>
               </a:rPr>
-              <a:t>특허검토필요 2건</a:t>
+              <a:t>출원검토필요 2건</a:t>
+            </a:r>
+          </a:p>
+        </p:txBody>
+      </p:sp>
+      <p:sp>
+        <p:nvSpPr>
+          <p:cNvPr id="22" name="출원검토필요 범례"/>
+          <p:cNvSpPr/>
+          <p:nvPr/>
+        </p:nvSpPr>
+        <p:spPr>
+          <a:xfrm>
+            <a:off x="5943600" y="228600"/>
+            <a:ext cx="3794760" cy="1261872"/>
+          </a:xfrm>
+          <a:prstGeom prst="roundRect">
+            <a:avLst/>
+          </a:prstGeom>
+          <a:solidFill>
+            <a:srgbClr val="FFFFFF"/>
+          </a:solidFill>
+          <a:ln w="12700">
+            <a:solidFill>
+              <a:srgbClr val="C62828"/>
+            </a:solidFill>
+          </a:ln>
+          <a:effectLst/>
+        </p:spPr>
+        <p:style>
+          <a:lnRef idx="1">
+            <a:schemeClr val="accent1"/>
+          </a:lnRef>
+          <a:fillRef idx="3">
+            <a:schemeClr val="accent1"/>
+          </a:fillRef>
+          <a:effectRef idx="2">
+            <a:schemeClr val="accent1"/>
+          </a:effectRef>
+          <a:fontRef idx="minor">
+            <a:schemeClr val="lt1"/>
+          </a:fontRef>
+        </p:style>
+        <p:txBody>
+          <a:bodyPr rtlCol="0" anchor="ctr" wrap="square" lIns="109728" rIns="109728" tIns="54864" bIns="54864"/>
+          <a:lstStyle/>
+          <a:p>
+            <a:pPr algn="l"/>
+            <a:r>
+              <a:rPr sz="1000" b="1">
+                <a:solidFill>
+                  <a:srgbClr val="C62828"/>
+                </a:solidFill>
+              </a:rPr>
+              <a:t>출원검토필요 표시 안내</a:t>
+            </a:r>
+          </a:p>
+          <a:p>
+            <a:pPr algn="l"/>
+            <a:r>
+              <a:rPr sz="900" b="1" u="sng">
+                <a:solidFill>
+                  <a:srgbClr val="141A22"/>
+                </a:solidFill>
+                <a:highlight>
+                  <a:srgbClr val="FFD54F"/>
+                </a:highlight>
+                <a:uFill>
+                  <a:solidFill>
+                    <a:srgbClr val="FFD54F"/>
+                  </a:solidFill>
+                </a:uFill>
+              </a:rPr>
+              <a:t> A </a:t>
+            </a:r>
+            <a:r>
+              <a:rPr sz="900">
+                <a:solidFill>
+                  <a:srgbClr val="141A22"/>
+                </a:solidFill>
+              </a:rPr>
+              <a:t>  즉시 출원 검토 — 구체적 기술 수단이 드러남</a:t>
+            </a:r>
+          </a:p>
+          <a:p>
+            <a:pPr algn="l"/>
+            <a:r>
+              <a:rPr sz="900" b="1" u="sng">
+                <a:solidFill>
+                  <a:srgbClr val="141A22"/>
+                </a:solidFill>
+                <a:highlight>
+                  <a:srgbClr val="9FD8F5"/>
+                </a:highlight>
+                <a:uFill>
+                  <a:solidFill>
+                    <a:srgbClr val="9FD8F5"/>
+                  </a:solidFill>
+                </a:uFill>
+              </a:rPr>
+              <a:t> B </a:t>
+            </a:r>
+            <a:r>
+              <a:rPr sz="900">
+                <a:solidFill>
+                  <a:srgbClr val="141A22"/>
+                </a:solidFill>
+              </a:rPr>
+              <a:t>  발명 발굴 필요 — 수단은 없으나 존재가 시사됨</a:t>
+            </a:r>
+          </a:p>
+          <a:p>
+            <a:pPr algn="l"/>
+            <a:r>
+              <a:rPr sz="900" b="1" u="sng">
+                <a:solidFill>
+                  <a:srgbClr val="141A22"/>
+                </a:solidFill>
+                <a:highlight>
+                  <a:srgbClr val="FF9E80"/>
+                </a:highlight>
+                <a:uFill>
+                  <a:solidFill>
+                    <a:srgbClr val="FF9E80"/>
+                  </a:solidFill>
+                </a:uFill>
+              </a:rPr>
+              <a:t> ⚠ </a:t>
+            </a:r>
+            <a:r>
+              <a:rPr sz="900">
+                <a:solidFill>
+                  <a:srgbClr val="141A22"/>
+                </a:solidFill>
+              </a:rPr>
+              <a:t>  공개 리스크 — 전시·논문 등 이미 공개된 내용</a:t>
+            </a:r>
+          </a:p>
+          <a:p>
+            <a:pPr algn="l"/>
+            <a:r>
+              <a:rPr sz="800">
+                <a:solidFill>
+                  <a:srgbClr val="5F6B7A"/>
+                </a:solidFill>
+              </a:rPr>
+              <a:t>형광펜(밑줄) 구간 = 출원 검토 필요</a:t>
+            </a:r>
+          </a:p>
+          <a:p>
+            <a:pPr algn="l"/>
+            <a:r>
+              <a:rPr sz="800">
+                <a:solidFill>
+                  <a:srgbClr val="5F6B7A"/>
+                </a:solidFill>
+              </a:rPr>
+              <a:t>근거: 발표자 노트  ·  전체 목록: 마지막 슬라이드</a:t>
             </a:r>
           </a:p>
         </p:txBody>
@@ -3772,17 +3878,6 @@
               <a:t xml:space="preserve">조립·물류 장비 중심 구조에서 검사 솔루션 중심으로 이동 중</a:t>
             </a:r>
             <a:r>
-              <a:rPr lang="en-US" sz="862" b="1" u="none">
-                <a:solidFill>
-                  <a:srgbClr val="C62828"/>
-                </a:solidFill>
-                <a:latin typeface="Malgun Gothic" pitchFamily="34" charset="0"/>
-                <a:ea typeface="Malgun Gothic" pitchFamily="34" charset="-122"/>
-                <a:cs typeface="Malgun Gothic" pitchFamily="34" charset="-120"/>
-              </a:rPr>
-              <a:t xml:space="preserve"> 【특허검토필요】</a:t>
-            </a:r>
-            <a:r>
               <a:rPr lang="en-US" sz="1150" dirty="0">
                 <a:solidFill>
                   <a:srgbClr val="1A2233"/>
@@ -3959,17 +4054,6 @@
               <a:t xml:space="preserve">검사 모듈 12조 공급 확정</a:t>
             </a:r>
             <a:r>
-              <a:rPr lang="en-US" sz="862" b="1" u="none">
-                <a:solidFill>
-                  <a:srgbClr val="C62828"/>
-                </a:solidFill>
-                <a:latin typeface="Malgun Gothic" pitchFamily="34" charset="0"/>
-                <a:ea typeface="Malgun Gothic" pitchFamily="34" charset="-122"/>
-                <a:cs typeface="Malgun Gothic" pitchFamily="34" charset="-120"/>
-              </a:rPr>
-              <a:t xml:space="preserve"> 【특허검토필요】</a:t>
-            </a:r>
-            <a:r>
               <a:rPr lang="en-US" sz="1150" dirty="0">
                 <a:solidFill>
                   <a:srgbClr val="1A2233"/>
@@ -4000,17 +4084,6 @@
               <a:t xml:space="preserve">2026년 3분기 현장 검증(SOP) 예정</a:t>
             </a:r>
             <a:r>
-              <a:rPr lang="en-US" sz="862" b="1" u="none">
-                <a:solidFill>
-                  <a:srgbClr val="C62828"/>
-                </a:solidFill>
-                <a:latin typeface="Malgun Gothic" pitchFamily="34" charset="0"/>
-                <a:ea typeface="Malgun Gothic" pitchFamily="34" charset="-122"/>
-                <a:cs typeface="Malgun Gothic" pitchFamily="34" charset="-120"/>
-              </a:rPr>
-              <a:t xml:space="preserve"> 【특허검토필요】</a:t>
-            </a:r>
-            <a:r>
               <a:rPr lang="en-US" sz="1150" dirty="0">
                 <a:solidFill>
                   <a:srgbClr val="1A2233"/>
@@ -4251,7 +4324,7 @@
       </p:sp>
       <p:sp>
         <p:nvSpPr>
-          <p:cNvPr id="19" name="특허검토필요 배지"/>
+          <p:cNvPr id="19" name="출원검토필요 배지"/>
           <p:cNvSpPr/>
           <p:nvPr/>
         </p:nvSpPr>
@@ -4296,7 +4369,7 @@
                   <a:srgbClr val="FFFFFF"/>
                 </a:solidFill>
               </a:rPr>
-              <a:t>특허검토필요 4건</a:t>
+              <a:t>출원검토필요 4건</a:t>
             </a:r>
           </a:p>
         </p:txBody>
@@ -4441,17 +4514,6 @@
               </a:rPr>
               <a:t>실시간 전극 결함 검출 알고리즘</a:t>
             </a:r>
-            <a:r>
-              <a:rPr lang="en-US" sz="2400" b="1" u="none">
-                <a:solidFill>
-                  <a:srgbClr val="C62828"/>
-                </a:solidFill>
-                <a:latin typeface="Malgun Gothic" pitchFamily="34" charset="0"/>
-                <a:ea typeface="Malgun Gothic" pitchFamily="34" charset="-122"/>
-                <a:cs typeface="Malgun Gothic" pitchFamily="34" charset="-120"/>
-              </a:rPr>
-              <a:t xml:space="preserve"> 【특허검토필요】</a:t>
-            </a:r>
             <a:endParaRPr lang="en-US" sz="3200" dirty="0"/>
           </a:p>
         </p:txBody>
@@ -4509,17 +4571,6 @@
                 <a:cs typeface="Malgun Gothic" pitchFamily="34" charset="-120"/>
               </a:rPr>
               <a:t xml:space="preserve">추론 부하를 2단계로 분리한 캐스케이드 구조를 신규 설계함</a:t>
-            </a:r>
-            <a:r>
-              <a:rPr lang="en-US" sz="937" b="1" u="none">
-                <a:solidFill>
-                  <a:srgbClr val="C62828"/>
-                </a:solidFill>
-                <a:latin typeface="Malgun Gothic" pitchFamily="34" charset="0"/>
-                <a:ea typeface="Malgun Gothic" pitchFamily="34" charset="-122"/>
-                <a:cs typeface="Malgun Gothic" pitchFamily="34" charset="-120"/>
-              </a:rPr>
-              <a:t xml:space="preserve"> 【특허검토필요】</a:t>
             </a:r>
             <a:r>
               <a:rPr lang="en-US" sz="1250" dirty="0">
@@ -5274,17 +5325,6 @@
               </a:rPr>
               <a:t>1차 모델은 정상 판정에만 특화된 경량 CNN으로, 정상 프레임을 즉시 배제해 2차 모델의 입력량을 1/33로 축소</a:t>
             </a:r>
-            <a:r>
-              <a:rPr lang="en-US" sz="862" b="1" u="none">
-                <a:solidFill>
-                  <a:srgbClr val="C62828"/>
-                </a:solidFill>
-                <a:latin typeface="Malgun Gothic" pitchFamily="34" charset="0"/>
-                <a:ea typeface="Malgun Gothic" pitchFamily="34" charset="-122"/>
-                <a:cs typeface="Malgun Gothic" pitchFamily="34" charset="-120"/>
-              </a:rPr>
-              <a:t xml:space="preserve"> 【특허검토필요】</a:t>
-            </a:r>
             <a:endParaRPr lang="en-US" sz="1150" dirty="0"/>
           </a:p>
           <a:p>
@@ -5317,17 +5357,6 @@
               </a:rPr>
               <a:t>결함 샘플 희소성 문제는 실 결함 1장당 합성 결함 200장을 생성하는 증강 파이프라인으로 보완 (결함 형태·위치·조도 랜덤화)</a:t>
             </a:r>
-            <a:r>
-              <a:rPr lang="en-US" sz="862" b="1" u="none">
-                <a:solidFill>
-                  <a:srgbClr val="C62828"/>
-                </a:solidFill>
-                <a:latin typeface="Malgun Gothic" pitchFamily="34" charset="0"/>
-                <a:ea typeface="Malgun Gothic" pitchFamily="34" charset="-122"/>
-                <a:cs typeface="Malgun Gothic" pitchFamily="34" charset="-120"/>
-              </a:rPr>
-              <a:t xml:space="preserve"> 【특허검토필요】</a:t>
-            </a:r>
             <a:endParaRPr lang="en-US" sz="1150" dirty="0"/>
           </a:p>
           <a:p>
@@ -5360,17 +5389,6 @@
               </a:rPr>
               <a:t>라인 속도 120 m/min 조건에서 20㎛급 미세 결함까지 검출 가능</a:t>
             </a:r>
-            <a:r>
-              <a:rPr lang="en-US" sz="862" b="1" u="none">
-                <a:solidFill>
-                  <a:srgbClr val="C62828"/>
-                </a:solidFill>
-                <a:latin typeface="Malgun Gothic" pitchFamily="34" charset="0"/>
-                <a:ea typeface="Malgun Gothic" pitchFamily="34" charset="-122"/>
-                <a:cs typeface="Malgun Gothic" pitchFamily="34" charset="-120"/>
-              </a:rPr>
-              <a:t xml:space="preserve"> 【특허검토필요】</a:t>
-            </a:r>
             <a:endParaRPr lang="en-US" sz="1150" dirty="0"/>
           </a:p>
           <a:p>
@@ -5403,17 +5421,6 @@
               </a:rPr>
               <a:t>판정 임계값을 직전 500프레임의 결함 밀도에 따라 자동 조정하는 적응형 임계 방식 적용</a:t>
             </a:r>
-            <a:r>
-              <a:rPr lang="en-US" sz="862" b="1" u="none">
-                <a:solidFill>
-                  <a:srgbClr val="C62828"/>
-                </a:solidFill>
-                <a:latin typeface="Malgun Gothic" pitchFamily="34" charset="0"/>
-                <a:ea typeface="Malgun Gothic" pitchFamily="34" charset="-122"/>
-                <a:cs typeface="Malgun Gothic" pitchFamily="34" charset="-120"/>
-              </a:rPr>
-              <a:t xml:space="preserve"> 【특허검토필요】</a:t>
-            </a:r>
             <a:endParaRPr lang="en-US" sz="1150" dirty="0"/>
           </a:p>
         </p:txBody>
@@ -5609,17 +5616,6 @@
               </a:rPr>
               <a:t>0.7%</a:t>
             </a:r>
-            <a:r>
-              <a:rPr lang="en-US" sz="1125" b="1" u="none">
-                <a:solidFill>
-                  <a:srgbClr val="C62828"/>
-                </a:solidFill>
-                <a:latin typeface="Malgun Gothic" pitchFamily="34" charset="0"/>
-                <a:ea typeface="Malgun Gothic" pitchFamily="34" charset="-122"/>
-                <a:cs typeface="Malgun Gothic" pitchFamily="34" charset="-120"/>
-              </a:rPr>
-              <a:t xml:space="preserve"> 【특허검토필요】</a:t>
-            </a:r>
             <a:endParaRPr lang="en-US" sz="1200" dirty="0"/>
           </a:p>
         </p:txBody>
@@ -5693,17 +5689,6 @@
               </a:rPr>
               <a:t>프레임당 추론 시간</a:t>
             </a:r>
-            <a:r>
-              <a:rPr lang="en-US" sz="862" b="1" u="none">
-                <a:solidFill>
-                  <a:srgbClr val="C62828"/>
-                </a:solidFill>
-                <a:latin typeface="Malgun Gothic" pitchFamily="34" charset="0"/>
-                <a:ea typeface="Malgun Gothic" pitchFamily="34" charset="-122"/>
-                <a:cs typeface="Malgun Gothic" pitchFamily="34" charset="-120"/>
-              </a:rPr>
-              <a:t xml:space="preserve"> 【특허검토필요】</a:t>
-            </a:r>
             <a:endParaRPr lang="en-US" sz="1150" dirty="0"/>
           </a:p>
         </p:txBody>
@@ -5795,17 +5780,6 @@
               </a:rPr>
               <a:t>11 ms</a:t>
             </a:r>
-            <a:r>
-              <a:rPr lang="en-US" sz="1125" b="1" u="none">
-                <a:solidFill>
-                  <a:srgbClr val="C62828"/>
-                </a:solidFill>
-                <a:latin typeface="Malgun Gothic" pitchFamily="34" charset="0"/>
-                <a:ea typeface="Malgun Gothic" pitchFamily="34" charset="-122"/>
-                <a:cs typeface="Malgun Gothic" pitchFamily="34" charset="-120"/>
-              </a:rPr>
-              <a:t xml:space="preserve"> 【특허검토필요】</a:t>
-            </a:r>
             <a:endParaRPr lang="en-US" sz="1200" dirty="0"/>
           </a:p>
         </p:txBody>
@@ -5962,17 +5936,6 @@
               </a:rPr>
               <a:t>4개</a:t>
             </a:r>
-            <a:r>
-              <a:rPr lang="en-US" sz="1125" b="1" u="none">
-                <a:solidFill>
-                  <a:srgbClr val="C62828"/>
-                </a:solidFill>
-                <a:latin typeface="Malgun Gothic" pitchFamily="34" charset="0"/>
-                <a:ea typeface="Malgun Gothic" pitchFamily="34" charset="-122"/>
-                <a:cs typeface="Malgun Gothic" pitchFamily="34" charset="-120"/>
-              </a:rPr>
-              <a:t xml:space="preserve"> 【특허검토필요】</a:t>
-            </a:r>
             <a:endParaRPr lang="en-US" sz="1200" dirty="0"/>
           </a:p>
         </p:txBody>
@@ -6057,7 +6020,7 @@
       </p:sp>
       <p:sp>
         <p:nvSpPr>
-          <p:cNvPr id="35" name="특허검토필요 배지"/>
+          <p:cNvPr id="35" name="출원검토필요 배지"/>
           <p:cNvSpPr/>
           <p:nvPr/>
         </p:nvSpPr>
@@ -6102,7 +6065,7 @@
                   <a:srgbClr val="FFFFFF"/>
                 </a:solidFill>
               </a:rPr>
-              <a:t>특허검토필요 11건</a:t>
+              <a:t>출원검토필요 11건</a:t>
             </a:r>
           </a:p>
         </p:txBody>
@@ -6247,17 +6210,6 @@
               </a:rPr>
               <a:t>광학 검사 모듈 및 공정 제어 개선</a:t>
             </a:r>
-            <a:r>
-              <a:rPr lang="en-US" sz="2400" b="1" u="none">
-                <a:solidFill>
-                  <a:srgbClr val="C62828"/>
-                </a:solidFill>
-                <a:latin typeface="Malgun Gothic" pitchFamily="34" charset="0"/>
-                <a:ea typeface="Malgun Gothic" pitchFamily="34" charset="-122"/>
-                <a:cs typeface="Malgun Gothic" pitchFamily="34" charset="-120"/>
-              </a:rPr>
-              <a:t xml:space="preserve"> 【특허검토필요】</a:t>
-            </a:r>
             <a:endParaRPr lang="en-US" sz="3200" dirty="0"/>
           </a:p>
         </p:txBody>
@@ -6443,17 +6395,6 @@
               </a:rPr>
               <a:t>450nm 청색광과 660nm 적색광을 200Hz로 교번 점등하고, 파장별 영상을 합성해 표면 결함과 내부 기공을 한 번의 스캔으로 동시 검출.</a:t>
             </a:r>
-            <a:r>
-              <a:rPr lang="en-US" sz="862" b="1" u="none">
-                <a:solidFill>
-                  <a:srgbClr val="C62828"/>
-                </a:solidFill>
-                <a:latin typeface="Malgun Gothic" pitchFamily="34" charset="0"/>
-                <a:ea typeface="Malgun Gothic" pitchFamily="34" charset="-122"/>
-                <a:cs typeface="Malgun Gothic" pitchFamily="34" charset="-120"/>
-              </a:rPr>
-              <a:t xml:space="preserve"> 【특허검토필요】</a:t>
-            </a:r>
             <a:endParaRPr lang="en-US" sz="1150" dirty="0"/>
           </a:p>
         </p:txBody>
@@ -6639,17 +6580,6 @@
               </a:rPr>
               <a:t>조명 입사각을 22~28° 구간에서 가변한 결과 미세 크랙 대비비가 최대. 24°를 표준 사양으로 확정하고 각도 가변 마운트를 자체 제작.</a:t>
             </a:r>
-            <a:r>
-              <a:rPr lang="en-US" sz="862" b="1" u="none">
-                <a:solidFill>
-                  <a:srgbClr val="C62828"/>
-                </a:solidFill>
-                <a:latin typeface="Malgun Gothic" pitchFamily="34" charset="0"/>
-                <a:ea typeface="Malgun Gothic" pitchFamily="34" charset="-122"/>
-                <a:cs typeface="Malgun Gothic" pitchFamily="34" charset="-120"/>
-              </a:rPr>
-              <a:t xml:space="preserve"> 【특허검토필요】</a:t>
-            </a:r>
             <a:endParaRPr lang="en-US" sz="1150" dirty="0"/>
           </a:p>
         </p:txBody>
@@ -6793,17 +6723,6 @@
               </a:rPr>
               <a:t>코팅 두께 실시간 피드백</a:t>
             </a:r>
-            <a:r>
-              <a:rPr lang="en-US" sz="1125" b="1" u="none">
-                <a:solidFill>
-                  <a:srgbClr val="C62828"/>
-                </a:solidFill>
-                <a:latin typeface="Malgun Gothic" pitchFamily="34" charset="0"/>
-                <a:ea typeface="Malgun Gothic" pitchFamily="34" charset="-122"/>
-                <a:cs typeface="Malgun Gothic" pitchFamily="34" charset="-120"/>
-              </a:rPr>
-              <a:t xml:space="preserve"> 【특허검토필요】</a:t>
-            </a:r>
             <a:endParaRPr lang="en-US" sz="1500" dirty="0"/>
           </a:p>
         </p:txBody>
@@ -6853,17 +6772,6 @@
                 <a:cs typeface="Malgun Gothic" pitchFamily="34" charset="-120"/>
               </a:rPr>
               <a:t>검사 결과를 코터 슬롯다이 제어기에 200ms 주기로 반영하는 폐루프 구성. 두께 편차 ±0.8㎛ → ±0.3㎛로 축소.</a:t>
-            </a:r>
-            <a:r>
-              <a:rPr lang="en-US" sz="862" b="1" u="none">
-                <a:solidFill>
-                  <a:srgbClr val="C62828"/>
-                </a:solidFill>
-                <a:latin typeface="Malgun Gothic" pitchFamily="34" charset="0"/>
-                <a:ea typeface="Malgun Gothic" pitchFamily="34" charset="-122"/>
-                <a:cs typeface="Malgun Gothic" pitchFamily="34" charset="-120"/>
-              </a:rPr>
-              <a:t xml:space="preserve"> 【특허검토필요】</a:t>
             </a:r>
             <a:endParaRPr lang="en-US" sz="1150" dirty="0"/>
           </a:p>
@@ -7008,17 +6916,6 @@
               </a:rPr>
               <a:t>모듈 원가 구조 개선</a:t>
             </a:r>
-            <a:r>
-              <a:rPr lang="en-US" sz="1125" b="1" u="none">
-                <a:solidFill>
-                  <a:srgbClr val="C62828"/>
-                </a:solidFill>
-                <a:latin typeface="Malgun Gothic" pitchFamily="34" charset="0"/>
-                <a:ea typeface="Malgun Gothic" pitchFamily="34" charset="-122"/>
-                <a:cs typeface="Malgun Gothic" pitchFamily="34" charset="-120"/>
-              </a:rPr>
-              <a:t xml:space="preserve"> 【특허검토필요】</a:t>
-            </a:r>
             <a:endParaRPr lang="en-US" sz="1500" dirty="0"/>
           </a:p>
         </p:txBody>
@@ -7069,17 +6966,6 @@
               </a:rPr>
               <a:t>라인스캔 카메라 4대 구성을 카메라 2대 + 분광 프리즘 구성으로 대체. 광학 모듈 원가 40% 절감, 설치 폭 320mm 축소.</a:t>
             </a:r>
-            <a:r>
-              <a:rPr lang="en-US" sz="862" b="1" u="none">
-                <a:solidFill>
-                  <a:srgbClr val="C62828"/>
-                </a:solidFill>
-                <a:latin typeface="Malgun Gothic" pitchFamily="34" charset="0"/>
-                <a:ea typeface="Malgun Gothic" pitchFamily="34" charset="-122"/>
-                <a:cs typeface="Malgun Gothic" pitchFamily="34" charset="-120"/>
-              </a:rPr>
-              <a:t xml:space="preserve"> 【특허검토필요】</a:t>
-            </a:r>
             <a:endParaRPr lang="en-US" sz="1150" dirty="0"/>
           </a:p>
         </p:txBody>
@@ -7231,17 +7117,6 @@
               </a:rPr>
               <a:t>광학 모듈 기준</a:t>
             </a:r>
-            <a:r>
-              <a:rPr lang="en-US" sz="800" b="1" u="none">
-                <a:solidFill>
-                  <a:srgbClr val="C62828"/>
-                </a:solidFill>
-                <a:latin typeface="Malgun Gothic" pitchFamily="34" charset="0"/>
-                <a:ea typeface="Malgun Gothic" pitchFamily="34" charset="-122"/>
-                <a:cs typeface="Malgun Gothic" pitchFamily="34" charset="-120"/>
-              </a:rPr>
-              <a:t xml:space="preserve"> 【특허검토필요】</a:t>
-            </a:r>
             <a:endParaRPr lang="en-US" sz="1000" dirty="0"/>
           </a:p>
         </p:txBody>
@@ -7367,17 +7242,6 @@
               </a:rPr>
               <a:t>기존 ±0.8㎛</a:t>
             </a:r>
-            <a:r>
-              <a:rPr lang="en-US" sz="800" b="1" u="none">
-                <a:solidFill>
-                  <a:srgbClr val="C62828"/>
-                </a:solidFill>
-                <a:latin typeface="Malgun Gothic" pitchFamily="34" charset="0"/>
-                <a:ea typeface="Malgun Gothic" pitchFamily="34" charset="-122"/>
-                <a:cs typeface="Malgun Gothic" pitchFamily="34" charset="-120"/>
-              </a:rPr>
-              <a:t xml:space="preserve"> 【특허검토필요】</a:t>
-            </a:r>
             <a:endParaRPr lang="en-US" sz="1000" dirty="0"/>
           </a:p>
         </p:txBody>
@@ -7464,17 +7328,6 @@
               </a:rPr>
               <a:t>△320mm</a:t>
             </a:r>
-            <a:r>
-              <a:rPr lang="en-US" sz="1500" b="1" u="none">
-                <a:solidFill>
-                  <a:srgbClr val="C62828"/>
-                </a:solidFill>
-                <a:latin typeface="Malgun Gothic" pitchFamily="34" charset="0"/>
-                <a:ea typeface="Malgun Gothic" pitchFamily="34" charset="-122"/>
-                <a:cs typeface="Malgun Gothic" pitchFamily="34" charset="-120"/>
-              </a:rPr>
-              <a:t xml:space="preserve"> 【특허검토필요】</a:t>
-            </a:r>
             <a:endParaRPr lang="en-US" sz="2000" dirty="0"/>
           </a:p>
         </p:txBody>
@@ -7522,17 +7375,6 @@
               </a:rPr>
               <a:t>라인 점유 면적 축소</a:t>
             </a:r>
-            <a:r>
-              <a:rPr lang="en-US" sz="800" b="1" u="none">
-                <a:solidFill>
-                  <a:srgbClr val="C62828"/>
-                </a:solidFill>
-                <a:latin typeface="Malgun Gothic" pitchFamily="34" charset="0"/>
-                <a:ea typeface="Malgun Gothic" pitchFamily="34" charset="-122"/>
-                <a:cs typeface="Malgun Gothic" pitchFamily="34" charset="-120"/>
-              </a:rPr>
-              <a:t xml:space="preserve"> 【특허검토필요】</a:t>
-            </a:r>
             <a:endParaRPr lang="en-US" sz="1000" dirty="0"/>
           </a:p>
         </p:txBody>
@@ -7734,7 +7576,7 @@
       </p:sp>
       <p:sp>
         <p:nvSpPr>
-          <p:cNvPr id="40" name="특허검토필요 배지"/>
+          <p:cNvPr id="40" name="출원검토필요 배지"/>
           <p:cNvSpPr/>
           <p:nvPr/>
         </p:nvSpPr>
@@ -7779,7 +7621,7 @@
                   <a:srgbClr val="FFFFFF"/>
                 </a:solidFill>
               </a:rPr>
-              <a:t>특허검토필요 12건</a:t>
+              <a:t>출원검토필요 12건</a:t>
             </a:r>
           </a:p>
         </p:txBody>
@@ -8044,17 +7886,6 @@
               </a:rPr>
               <a:t>검사 모듈 12조 설치 및 SOP 승인</a:t>
             </a:r>
-            <a:r>
-              <a:rPr lang="en-US" sz="862" b="1" u="none">
-                <a:solidFill>
-                  <a:srgbClr val="C62828"/>
-                </a:solidFill>
-                <a:latin typeface="Malgun Gothic" pitchFamily="34" charset="0"/>
-                <a:ea typeface="Malgun Gothic" pitchFamily="34" charset="-122"/>
-                <a:cs typeface="Malgun Gothic" pitchFamily="34" charset="-120"/>
-              </a:rPr>
-              <a:t xml:space="preserve"> 【특허검토필요】</a:t>
-            </a:r>
             <a:endParaRPr lang="en-US" sz="1150" dirty="0"/>
           </a:p>
         </p:txBody>
@@ -8167,17 +7998,6 @@
               </a:rPr>
               <a:t>원통형 46파이 라인 대응</a:t>
             </a:r>
-            <a:r>
-              <a:rPr lang="en-US" sz="1125" b="1" u="none">
-                <a:solidFill>
-                  <a:srgbClr val="C62828"/>
-                </a:solidFill>
-                <a:latin typeface="Malgun Gothic" pitchFamily="34" charset="0"/>
-                <a:ea typeface="Malgun Gothic" pitchFamily="34" charset="-122"/>
-                <a:cs typeface="Malgun Gothic" pitchFamily="34" charset="-120"/>
-              </a:rPr>
-              <a:t xml:space="preserve"> 【특허검토필요】</a:t>
-            </a:r>
             <a:endParaRPr lang="en-US" sz="1500" dirty="0"/>
           </a:p>
         </p:txBody>
@@ -8228,17 +8048,6 @@
               </a:rPr>
               <a:t>곡면 전극용 광학계 파생 모델 개발</a:t>
             </a:r>
-            <a:r>
-              <a:rPr lang="en-US" sz="862" b="1" u="none">
-                <a:solidFill>
-                  <a:srgbClr val="C62828"/>
-                </a:solidFill>
-                <a:latin typeface="Malgun Gothic" pitchFamily="34" charset="0"/>
-                <a:ea typeface="Malgun Gothic" pitchFamily="34" charset="-122"/>
-                <a:cs typeface="Malgun Gothic" pitchFamily="34" charset="-120"/>
-              </a:rPr>
-              <a:t xml:space="preserve"> 【특허검토필요】</a:t>
-            </a:r>
             <a:endParaRPr lang="en-US" sz="1150" dirty="0"/>
           </a:p>
         </p:txBody>
@@ -8351,17 +8160,6 @@
               </a:rPr>
               <a:t>수율 예측 서비스 상용화</a:t>
             </a:r>
-            <a:r>
-              <a:rPr lang="en-US" sz="1125" b="1" u="none">
-                <a:solidFill>
-                  <a:srgbClr val="C62828"/>
-                </a:solidFill>
-                <a:latin typeface="Malgun Gothic" pitchFamily="34" charset="0"/>
-                <a:ea typeface="Malgun Gothic" pitchFamily="34" charset="-122"/>
-                <a:cs typeface="Malgun Gothic" pitchFamily="34" charset="-120"/>
-              </a:rPr>
-              <a:t xml:space="preserve"> 【특허검토필요】</a:t>
-            </a:r>
             <a:endParaRPr lang="en-US" sz="1500" dirty="0"/>
           </a:p>
         </p:txBody>
@@ -8411,17 +8209,6 @@
                 <a:cs typeface="Malgun Gothic" pitchFamily="34" charset="-120"/>
               </a:rPr>
               <a:t>누적 검사 데이터 기반 불량 사전 예측</a:t>
-            </a:r>
-            <a:r>
-              <a:rPr lang="en-US" sz="862" b="1" u="none">
-                <a:solidFill>
-                  <a:srgbClr val="C62828"/>
-                </a:solidFill>
-                <a:latin typeface="Malgun Gothic" pitchFamily="34" charset="0"/>
-                <a:ea typeface="Malgun Gothic" pitchFamily="34" charset="-122"/>
-                <a:cs typeface="Malgun Gothic" pitchFamily="34" charset="-120"/>
-              </a:rPr>
-              <a:t xml:space="preserve"> 【특허검토필요】</a:t>
             </a:r>
             <a:endParaRPr lang="en-US" sz="1150" dirty="0"/>
           </a:p>
@@ -8558,17 +8345,6 @@
               </a:rPr>
               <a:t xml:space="preserve">2단계 캐스케이드 검사 공정을 실물 시연, 동작 화면 및 판정 로직 개요가 참관객에게 노출됨</a:t>
             </a:r>
-            <a:r>
-              <a:rPr lang="en-US" sz="937" b="1" u="none">
-                <a:solidFill>
-                  <a:srgbClr val="C62828"/>
-                </a:solidFill>
-                <a:latin typeface="Malgun Gothic" pitchFamily="34" charset="0"/>
-                <a:ea typeface="Malgun Gothic" pitchFamily="34" charset="-122"/>
-                <a:cs typeface="Malgun Gothic" pitchFamily="34" charset="-120"/>
-              </a:rPr>
-              <a:t xml:space="preserve"> 【특허검토필요】</a:t>
-            </a:r>
             <a:endParaRPr lang="en-US" sz="1250" dirty="0"/>
           </a:p>
           <a:p>
@@ -8612,17 +8388,6 @@
               </a:rPr>
               <a:t xml:space="preserve">다중 파장 교번 조명 방식의 실험 데이터 포함</a:t>
             </a:r>
-            <a:r>
-              <a:rPr lang="en-US" sz="937" b="1" u="none">
-                <a:solidFill>
-                  <a:srgbClr val="C62828"/>
-                </a:solidFill>
-                <a:latin typeface="Malgun Gothic" pitchFamily="34" charset="0"/>
-                <a:ea typeface="Malgun Gothic" pitchFamily="34" charset="-122"/>
-                <a:cs typeface="Malgun Gothic" pitchFamily="34" charset="-120"/>
-              </a:rPr>
-              <a:t xml:space="preserve"> 【특허검토필요】</a:t>
-            </a:r>
             <a:endParaRPr lang="en-US" sz="1250" dirty="0"/>
           </a:p>
           <a:p>
@@ -8666,17 +8431,6 @@
               </a:rPr>
               <a:t xml:space="preserve">유사한 다중 파장 조명 검사 방식을 2025. 11 공개특허로 등록 공개한 것으로 확인됨</a:t>
             </a:r>
-            <a:r>
-              <a:rPr lang="en-US" sz="937" b="1" u="none">
-                <a:solidFill>
-                  <a:srgbClr val="C62828"/>
-                </a:solidFill>
-                <a:latin typeface="Malgun Gothic" pitchFamily="34" charset="0"/>
-                <a:ea typeface="Malgun Gothic" pitchFamily="34" charset="-122"/>
-                <a:cs typeface="Malgun Gothic" pitchFamily="34" charset="-120"/>
-              </a:rPr>
-              <a:t xml:space="preserve"> 【특허검토필요】</a:t>
-            </a:r>
             <a:endParaRPr lang="en-US" sz="1250" dirty="0"/>
           </a:p>
           <a:p>
@@ -8720,17 +8474,6 @@
               </a:rPr>
               <a:t xml:space="preserve">자사 명의의 출원 실적이 없으며, 지식재산 담당 부서의 검토가 진행된 바 없음</a:t>
             </a:r>
-            <a:r>
-              <a:rPr lang="en-US" sz="937" b="1" u="none">
-                <a:solidFill>
-                  <a:srgbClr val="C62828"/>
-                </a:solidFill>
-                <a:latin typeface="Malgun Gothic" pitchFamily="34" charset="0"/>
-                <a:ea typeface="Malgun Gothic" pitchFamily="34" charset="-122"/>
-                <a:cs typeface="Malgun Gothic" pitchFamily="34" charset="-120"/>
-              </a:rPr>
-              <a:t xml:space="preserve"> 【특허검토필요】</a:t>
-            </a:r>
             <a:endParaRPr lang="en-US" sz="1250" dirty="0"/>
           </a:p>
         </p:txBody>
@@ -8815,7 +8558,7 @@
       </p:sp>
       <p:sp>
         <p:nvSpPr>
-          <p:cNvPr id="21" name="특허검토필요 배지"/>
+          <p:cNvPr id="21" name="출원검토필요 배지"/>
           <p:cNvSpPr/>
           <p:nvPr/>
         </p:nvSpPr>
@@ -8860,7 +8603,7 @@
                   <a:srgbClr val="FFFFFF"/>
                 </a:solidFill>
               </a:rPr>
-              <a:t>특허검토필요 11건</a:t>
+              <a:t>출원검토필요 11건</a:t>
             </a:r>
           </a:p>
         </p:txBody>
@@ -8907,7 +8650,7 @@
           <a:p>
             <a:r>
               <a:rPr sz="2400" b="1"/>
-              <a:t>특허 검토 마킹 요약 (1/4)</a:t>
+              <a:t>출원 검토 마킹 요약 (1/4)</a:t>
             </a:r>
           </a:p>
         </p:txBody>
@@ -8977,13 +8720,13 @@
           <a:p>
             <a:r>
               <a:rPr sz="1100"/>
-              <a:t>p2  [B·묵시]  구성·구조  |  조립·물류 장비 중심 구조에서 검사 솔루션 중심으로 이동 중</a:t>
+              <a:t>p2  [B·묵시]  구조  |  조립·물류 장비 중심 구조에서 검사 솔루션 중심으로 이동 중</a:t>
             </a:r>
           </a:p>
           <a:p>
             <a:r>
               <a:rPr sz="1100"/>
-              <a:t>p2  [B·묵시·⚠공개]  수치·범위한정  |  검사 모듈 12조 공급 확정</a:t>
+              <a:t>p2  [B·묵시·⚠공개]  범위한정  |  검사 모듈 12조 공급 확정</a:t>
             </a:r>
           </a:p>
           <a:p>
@@ -8995,49 +8738,49 @@
           <a:p>
             <a:r>
               <a:rPr sz="1100"/>
-              <a:t>p2  [B·묵시]  수치·범위한정  |  광학 모듈 원가 절감 효과</a:t>
+              <a:t>p2  [B·묵시]  범위한정  |  광학 모듈 원가 절감 효과</a:t>
             </a:r>
           </a:p>
           <a:p>
             <a:r>
               <a:rPr sz="1100"/>
-              <a:t>p3  [B·묵시]  제어·알고리즘  |  실시간 전극 결함 검출 알고리즘</a:t>
+              <a:t>p3  [B·묵시]  알고리즘  |  실시간 전극 결함 검출 알고리즘</a:t>
             </a:r>
           </a:p>
           <a:p>
             <a:r>
               <a:rPr sz="1100"/>
-              <a:t>p3  [A]  구성·구조  |  추론 부하를 2단계로 분리한 캐스케이드 구조를 신규 설계함</a:t>
+              <a:t>p3  [A]  구조  |  추론 부하를 2단계로 분리한 캐스케이드 구조를 신규 설계함</a:t>
             </a:r>
           </a:p>
           <a:p>
             <a:r>
               <a:rPr sz="1100"/>
-              <a:t>p3  [A]  제어·알고리즘  |  1차 모델은 정상 판정에만 특화된 경량 CNN으로, 정상 프레임을 즉시 배제해 2차 모델의 입력량…</a:t>
+              <a:t>p3  [A]  알고리즘  |  1차 모델은 정상 판정에만 특화된 경량 CNN으로, 정상 프레임을 즉시 배제해 2차 모델의 입력량…</a:t>
             </a:r>
           </a:p>
           <a:p>
             <a:r>
               <a:rPr sz="1100"/>
-              <a:t>p3  [A]  공정·방법  |  결함 샘플 희소성 문제는 실 결함 1장당 합성 결함 200장을 생성하는 증강 파이프라인으로 보완 …</a:t>
+              <a:t>p3  [A]  방법  |  결함 샘플 희소성 문제는 실 결함 1장당 합성 결함 200장을 생성하는 증강 파이프라인으로 보완 …</a:t>
             </a:r>
           </a:p>
           <a:p>
             <a:r>
               <a:rPr sz="1100"/>
-              <a:t>p3  [B·묵시]  수치·범위한정  |  라인 속도 120 m/min 조건에서 20㎛급 미세 결함까지 검출 가능</a:t>
+              <a:t>p3  [B·묵시]  범위한정  |  라인 속도 120 m/min 조건에서 20㎛급 미세 결함까지 검출 가능</a:t>
             </a:r>
           </a:p>
           <a:p>
             <a:r>
               <a:rPr sz="1100"/>
-              <a:t>p3  [A]  제어·알고리즘  |  판정 임계값을 직전 500프레임의 결함 밀도에 따라 자동 조정하는 적응형 임계 방식 적용</a:t>
+              <a:t>p3  [A]  알고리즘  |  판정 임계값을 직전 500프레임의 결함 밀도에 따라 자동 조정하는 적응형 임계 방식 적용</a:t>
             </a:r>
           </a:p>
           <a:p>
             <a:r>
               <a:rPr sz="1100"/>
-              <a:t>p3  [B·묵시]  수치·범위한정  |  4.2%   →   0.7%</a:t>
+              <a:t>p3  [B·묵시]  범위한정  |  4.2%   →   0.7%</a:t>
             </a:r>
           </a:p>
         </p:txBody>
@@ -9113,7 +8856,7 @@
           <a:p>
             <a:r>
               <a:rPr sz="2400" b="1"/>
-              <a:t>특허 검토 마킹 요약 (2/4)</a:t>
+              <a:t>출원 검토 마킹 요약 (2/4)</a:t>
             </a:r>
           </a:p>
         </p:txBody>
@@ -9171,19 +8914,19 @@
           <a:p>
             <a:r>
               <a:rPr sz="1100"/>
-              <a:t>p3  [B·묵시]  제어·알고리즘  |  프레임당 추론 시간</a:t>
+              <a:t>p3  [B·묵시]  알고리즘  |  프레임당 추론 시간</a:t>
             </a:r>
           </a:p>
           <a:p>
             <a:r>
               <a:rPr sz="1100"/>
-              <a:t>p3  [B·묵시]  수치·범위한정  |  38 ms   →   11 ms</a:t>
+              <a:t>p3  [B·묵시]  범위한정  |  38 ms   →   11 ms</a:t>
             </a:r>
           </a:p>
           <a:p>
             <a:r>
               <a:rPr sz="1100"/>
-              <a:t>p3  [B·묵시]  수치·범위한정  |  1개   →   4개</a:t>
+              <a:t>p3  [B·묵시]  범위한정  |  1개   →   4개</a:t>
             </a:r>
           </a:p>
           <a:p>
@@ -9195,55 +8938,55 @@
           <a:p>
             <a:r>
               <a:rPr sz="1100"/>
-              <a:t>p4  [B·묵시]  공정·방법  |  광학 검사 모듈 및 공정 제어 개선</a:t>
+              <a:t>p4  [B·묵시]  방법  |  광학 검사 모듈 및 공정 제어 개선</a:t>
             </a:r>
           </a:p>
           <a:p>
             <a:r>
               <a:rPr sz="1100"/>
-              <a:t>p4  [A]  구성·구조  |  450nm 청색광과 660nm 적색광을 200Hz로 교번 점등하고, 파장별 영상을 합성해 표면 결…</a:t>
+              <a:t>p4  [A]  구조  |  450nm 청색광과 660nm 적색광을 200Hz로 교번 점등하고, 파장별 영상을 합성해 표면 결…</a:t>
             </a:r>
           </a:p>
           <a:p>
             <a:r>
               <a:rPr sz="1100"/>
-              <a:t>p4  [B·묵시]  수치·범위한정  |  조명 입사각을 22~28° 구간에서 가변한 결과 미세 크랙 대비비가 최대. 24°를 표준 사양으로…</a:t>
+              <a:t>p4  [B·묵시]  범위한정  |  조명 입사각을 22~28° 구간에서 가변한 결과 미세 크랙 대비비가 최대. 24°를 표준 사양으로…</a:t>
             </a:r>
           </a:p>
           <a:p>
             <a:r>
               <a:rPr sz="1100"/>
-              <a:t>p4  [B·묵시]  제어·알고리즘  |  코팅 두께 실시간 피드백</a:t>
+              <a:t>p4  [B·묵시]  알고리즘  |  코팅 두께 실시간 피드백</a:t>
             </a:r>
           </a:p>
           <a:p>
             <a:r>
               <a:rPr sz="1100"/>
-              <a:t>p4  [B·묵시]  수치·범위한정  |  검사 결과를 코터 슬롯다이 제어기에 200ms 주기로 반영하는 폐루프 구성. 두께 편차 ±0.8㎛…</a:t>
+              <a:t>p4  [B·묵시]  범위한정  |  검사 결과를 코터 슬롯다이 제어기에 200ms 주기로 반영하는 폐루프 구성. 두께 편차 ±0.8㎛…</a:t>
             </a:r>
           </a:p>
           <a:p>
             <a:r>
               <a:rPr sz="1100"/>
-              <a:t>p4  [B·묵시]  공정·방법  |  모듈 원가 구조 개선</a:t>
+              <a:t>p4  [B·묵시]  방법  |  모듈 원가 구조 개선</a:t>
             </a:r>
           </a:p>
           <a:p>
             <a:r>
               <a:rPr sz="1100"/>
-              <a:t>p4  [A]  구성·구조  |  라인스캔 카메라 4대 구성을 카메라 2대 + 분광 프리즘 구성으로 대체. 광학 모듈 원가 40% …</a:t>
+              <a:t>p4  [A]  구조  |  라인스캔 카메라 4대 구성을 카메라 2대 + 분광 프리즘 구성으로 대체. 광학 모듈 원가 40% …</a:t>
             </a:r>
           </a:p>
           <a:p>
             <a:r>
               <a:rPr sz="1100"/>
-              <a:t>p4  [B·묵시]  구성·구조  |  광학 모듈 기준</a:t>
+              <a:t>p4  [B·묵시]  구조  |  광학 모듈 기준</a:t>
             </a:r>
           </a:p>
           <a:p>
             <a:r>
               <a:rPr sz="1100"/>
-              <a:t>p4  [B·묵시]  수치·범위한정  |  기존 ±0.8㎛</a:t>
+              <a:t>p4  [B·묵시]  범위한정  |  기존 ±0.8㎛</a:t>
             </a:r>
           </a:p>
         </p:txBody>
@@ -9319,7 +9062,7 @@
           <a:p>
             <a:r>
               <a:rPr sz="2400" b="1"/>
-              <a:t>특허 검토 마킹 요약 (3/4)</a:t>
+              <a:t>출원 검토 마킹 요약 (3/4)</a:t>
             </a:r>
           </a:p>
         </p:txBody>
@@ -9377,7 +9120,7 @@
           <a:p>
             <a:r>
               <a:rPr sz="1100"/>
-              <a:t>p4  [B·묵시]  수치·범위한정  |  △320mm</a:t>
+              <a:t>p4  [B·묵시]  범위한정  |  △320mm</a:t>
             </a:r>
           </a:p>
           <a:p>
@@ -9525,7 +9268,7 @@
           <a:p>
             <a:r>
               <a:rPr sz="2400" b="1"/>
-              <a:t>특허 검토 마킹 요약 (4/4)</a:t>
+              <a:t>출원 검토 마킹 요약 (4/4)</a:t>
             </a:r>
           </a:p>
         </p:txBody>

--- a/samples/회사보고자료_예시_마킹결과.pptx
+++ b/samples/회사보고자료_예시_마킹결과.pptx
@@ -10,10 +10,6 @@
     <p:sldId id="258" r:id="rId4"/>
     <p:sldId id="259" r:id="rId5"/>
     <p:sldId id="260" r:id="rId6"/>
-    <p:sldId id="261" r:id="rId12"/>
-    <p:sldId id="262" r:id="rId13"/>
-    <p:sldId id="263" r:id="rId14"/>
-    <p:sldId id="264" r:id="rId15"/>
   </p:sldIdLst>
   <p:notesMasterIdLst>
     <p:notesMasterId r:id="rId7"/>
@@ -908,81 +904,6 @@
             </a:r>
             <a:endParaRPr lang="en-US" dirty="0"/>
           </a:p>
-          <a:p/>
-          <a:p>
-            <a:r>
-              <a:rPr sz="1000"/>
-              <a:t>━━━━━━ 출원 검토 마킹 (자동 생성) ━━━━━━</a:t>
-            </a:r>
-          </a:p>
-          <a:p>
-            <a:r>
-              <a:rPr sz="1000"/>
-              <a:t>[B · 묵시 · 공개이력] “관련 기술 특허 출원”</a:t>
-            </a:r>
-          </a:p>
-          <a:p>
-            <a:r>
-              <a:rPr sz="1000"/>
-              <a:t>    → 특허 출원이 이루어져야 함을 시사하는 표현</a:t>
-            </a:r>
-          </a:p>
-          <a:p>
-            <a:r>
-              <a:rPr sz="1000"/>
-              <a:t>[C · ⚠공개 · 공개이력] “일부 내용은 이미 외부에 공개된 이력이 있음”</a:t>
-            </a:r>
-          </a:p>
-          <a:p>
-            <a:r>
-              <a:rPr sz="1000"/>
-              <a:t>    → 기술이 외부에 드러났거나 드러날 예정임을 뜻하는 문장</a:t>
-            </a:r>
-          </a:p>
-          <a:p/>
-          <a:p>
-            <a:r>
-              <a:rPr sz="1000"/>
-              <a:t>【 범례 】</a:t>
-            </a:r>
-          </a:p>
-          <a:p>
-            <a:r>
-              <a:rPr sz="1000"/>
-              <a:t>  ■ A (FFD54F) 즉시 출원 검토 — 구체적 기술 수단이 문면에 드러남</a:t>
-            </a:r>
-          </a:p>
-          <a:p>
-            <a:r>
-              <a:rPr sz="1000"/>
-              <a:t>  ■ B (9FD8F5) 발명 발굴 필요 — 수단은 미기재이나 존재가 시사됨</a:t>
-            </a:r>
-          </a:p>
-          <a:p>
-            <a:r>
-              <a:rPr sz="1000"/>
-              <a:t>  ■ ⚠ (FF9E80) 공개 리스크 — 신규성 상실 우려, 기한 확인 필요</a:t>
-            </a:r>
-          </a:p>
-          <a:p>
-            <a:r>
-              <a:rPr sz="1000"/>
-              <a:t>  형광펜(밑줄) 구간이 출원 검토가 필요한 곳입니다. 색 안내는 첫 슬라이드의 범례 상자에 있습니다.</a:t>
-            </a:r>
-          </a:p>
-          <a:p/>
-          <a:p>
-            <a:r>
-              <a:rPr sz="1000"/>
-              <a:t>본 마킹은 변리사 검토 전 1차 스크리닝 결과입니다.</a:t>
-            </a:r>
-          </a:p>
-          <a:p>
-            <a:r>
-              <a:rPr sz="1000"/>
-              <a:t>선행기술 조사와 신규성·진보성 판단은 포함되어 있지 않습니다.</a:t>
-            </a:r>
-          </a:p>
         </p:txBody>
       </p:sp>
       <p:sp>
@@ -1088,61 +1009,6 @@
             </a:r>
             <a:endParaRPr lang="en-US" dirty="0"/>
           </a:p>
-          <a:p/>
-          <a:p>
-            <a:r>
-              <a:rPr sz="1000"/>
-              <a:t>━━━━━━ 출원 검토 마킹 (자동 생성) ━━━━━━</a:t>
-            </a:r>
-          </a:p>
-          <a:p>
-            <a:r>
-              <a:rPr sz="1000"/>
-              <a:t>[B · 묵시 · 구조] “조립·물류 장비 중심 구조에서 검사 솔루션 중심으로 이동 중”</a:t>
-            </a:r>
-          </a:p>
-          <a:p>
-            <a:r>
-              <a:rPr sz="1000"/>
-              <a:t>    → 구조 변화에 따른 기술적 개선이 존재함을 시사한다.</a:t>
-            </a:r>
-          </a:p>
-          <a:p>
-            <a:r>
-              <a:rPr sz="1000"/>
-              <a:t>[B · 묵시 · ⚠공개 · 범위한정] “검사 모듈 12조 공급 확정”</a:t>
-            </a:r>
-          </a:p>
-          <a:p>
-            <a:r>
-              <a:rPr sz="1000"/>
-              <a:t>    → 공급 확정에 따른 기술적 구성이 존재함을 시사한다.</a:t>
-            </a:r>
-          </a:p>
-          <a:p>
-            <a:r>
-              <a:rPr sz="1000"/>
-              <a:t>[B · 묵시 · ⚠공개 · 공개이력] “2026년 3분기 현장 검증(SOP) 예정”</a:t>
-            </a:r>
-          </a:p>
-          <a:p>
-            <a:r>
-              <a:rPr sz="1000"/>
-              <a:t>    → 기술이 외부에 드러날 예정임을 시사한다.</a:t>
-            </a:r>
-          </a:p>
-          <a:p>
-            <a:r>
-              <a:rPr sz="1000"/>
-              <a:t>[B · 묵시 · 범위한정] “광학 모듈 원가 절감 효과”</a:t>
-            </a:r>
-          </a:p>
-          <a:p>
-            <a:r>
-              <a:rPr sz="1000"/>
-              <a:t>    → 원가 절감에 기여한 기술적 수단이 존재함을 시사한다.</a:t>
-            </a:r>
-          </a:p>
         </p:txBody>
       </p:sp>
       <p:sp>
@@ -1245,145 +1111,6 @@
             </a:r>
             <a:endParaRPr lang="en-US" dirty="0"/>
           </a:p>
-          <a:p/>
-          <a:p>
-            <a:r>
-              <a:rPr sz="1000"/>
-              <a:t>━━━━━━ 출원 검토 마킹 (자동 생성) ━━━━━━</a:t>
-            </a:r>
-          </a:p>
-          <a:p>
-            <a:r>
-              <a:rPr sz="1000"/>
-              <a:t>[B · 묵시 · 알고리즘] “실시간 전극 결함 검출 알고리즘”</a:t>
-            </a:r>
-          </a:p>
-          <a:p>
-            <a:r>
-              <a:rPr sz="1000"/>
-              <a:t>    → 알고리즘이라는 기술 명사가 등장하며, 실시간 검출이라는 기능적 효과를 내는 제어 수단이 존재함을 시사함.</a:t>
-            </a:r>
-          </a:p>
-          <a:p>
-            <a:r>
-              <a:rPr sz="1000"/>
-              <a:t>[A · 구조] “추론 부하를 2단계로 분리한 캐스케이드 구조를 신규 설계함”</a:t>
-            </a:r>
-          </a:p>
-          <a:p>
-            <a:r>
-              <a:rPr sz="1000"/>
-              <a:t>    → 구체적인 구조 설계 방법이 명시되어 있어, 청구항 초안으로 바로 전개 가능함.</a:t>
-            </a:r>
-          </a:p>
-          <a:p>
-            <a:r>
-              <a:rPr sz="1000"/>
-              <a:t>[A · 알고리즘] “1차 모델은 정상 판정에만 특화된 경량 CNN으로, 정상 프레임을 즉시 배제해 2차 모델의 입력량을 1/33로 축소”</a:t>
-            </a:r>
-          </a:p>
-          <a:p>
-            <a:r>
-              <a:rPr sz="1000"/>
-              <a:t>    → 1차 모델의 특화된 기능과 입력량 축소 효과가 구체적으로 설명되어 있음.</a:t>
-            </a:r>
-          </a:p>
-          <a:p>
-            <a:r>
-              <a:rPr sz="1000"/>
-              <a:t>[A · 방법] “결함 샘플 희소성 문제는 실 결함 1장당 합성 결함 200장을 생성하는 증강 파이프라인으로 보완 (결함 형태·위치·조도 랜덤화)”</a:t>
-            </a:r>
-          </a:p>
-          <a:p>
-            <a:r>
-              <a:rPr sz="1000"/>
-              <a:t>    → 구체적인 증강 방법과 생성 비율이 명시되어 있어, 기술적 수단이 명확히 드러남.</a:t>
-            </a:r>
-          </a:p>
-          <a:p>
-            <a:r>
-              <a:rPr sz="1000"/>
-              <a:t>[B · 묵시 · 범위한정] “라인 속도 120 m/min 조건에서 20㎛급 미세 결함까지 검출 가능”</a:t>
-            </a:r>
-          </a:p>
-          <a:p>
-            <a:r>
-              <a:rPr sz="1000"/>
-              <a:t>    → 검출 가능한 결함 크기와 속도 조건이 명시되어 있으나, 이를 가능하게 한 기술 수단은 설명되지 않음.</a:t>
-            </a:r>
-          </a:p>
-          <a:p>
-            <a:r>
-              <a:rPr sz="1000"/>
-              <a:t>[A · 알고리즘] “판정 임계값을 직전 500프레임의 결함 밀도에 따라 자동 조정하는 적응형 임계 방식 적용”</a:t>
-            </a:r>
-          </a:p>
-          <a:p>
-            <a:r>
-              <a:rPr sz="1000"/>
-              <a:t>    → 임계값 자동 조정 방식이 구체적으로 설명되어 있어, 기술적 수단이 명확히 드러남.</a:t>
-            </a:r>
-          </a:p>
-          <a:p>
-            <a:r>
-              <a:rPr sz="1000"/>
-              <a:t>[B · 묵시 · 범위한정] “4.2%   →   0.7%”</a:t>
-            </a:r>
-          </a:p>
-          <a:p>
-            <a:r>
-              <a:rPr sz="1000"/>
-              <a:t>    → 불량률 향상 효과만 기재되어 있으나, 이를 가능하게 한 기술 수단은 설명되지 않음.</a:t>
-            </a:r>
-          </a:p>
-          <a:p>
-            <a:r>
-              <a:rPr sz="1000"/>
-              <a:t>[B · 묵시 · 알고리즘] “프레임당 추론 시간”</a:t>
-            </a:r>
-          </a:p>
-          <a:p>
-            <a:r>
-              <a:rPr sz="1000"/>
-              <a:t>    → 추론 시간이라는 기능적 효과가 언급되었으나, 이를 가능하게 한 제어 수단은 설명되지 않음.</a:t>
-            </a:r>
-          </a:p>
-          <a:p>
-            <a:r>
-              <a:rPr sz="1000"/>
-              <a:t>[B · 묵시 · 범위한정] “38 ms   →   11 ms”</a:t>
-            </a:r>
-          </a:p>
-          <a:p>
-            <a:r>
-              <a:rPr sz="1000"/>
-              <a:t>    → 추론 시간 향상 효과만 기재되어 있으나, 이를 가능하게 한 기술 수단은 설명되지 않음.</a:t>
-            </a:r>
-          </a:p>
-          <a:p>
-            <a:r>
-              <a:rPr sz="1000"/>
-              <a:t>[B · 묵시 · 범위한정] “1개   →   4개”</a:t>
-            </a:r>
-          </a:p>
-          <a:p>
-            <a:r>
-              <a:rPr sz="1000"/>
-              <a:t>    → 처리 라인 수 향상 효과만 기재되어 있으나, 이를 가능하게 한 기술 수단은 설명되지 않음.</a:t>
-            </a:r>
-          </a:p>
-          <a:p>
-            <a:r>
-              <a:rPr sz="1000"/>
-              <a:t>[B · 묵시 · ⚠공개 · 독자성주장] “캐스케이드 구조와 적응형 임계 방식은 사내 독자 설계이며 현재 논문·특허 등 공개 실적 없음.”</a:t>
-            </a:r>
-          </a:p>
-          <a:p>
-            <a:r>
-              <a:rPr sz="1000"/>
-              <a:t>    → 독자 설계라는 주장이 있으며, 논문·특허 공개 예정이 없음을 언급하여, 공개 리스크가 있음.</a:t>
-            </a:r>
-          </a:p>
         </p:txBody>
       </p:sp>
       <p:sp>
@@ -1486,157 +1213,6 @@
             </a:r>
             <a:endParaRPr lang="en-US" dirty="0"/>
           </a:p>
-          <a:p/>
-          <a:p>
-            <a:r>
-              <a:rPr sz="1000"/>
-              <a:t>━━━━━━ 출원 검토 마킹 (자동 생성) ━━━━━━</a:t>
-            </a:r>
-          </a:p>
-          <a:p>
-            <a:r>
-              <a:rPr sz="1000"/>
-              <a:t>[B · 묵시 · 방법] “광학 검사 모듈 및 공정 제어 개선”</a:t>
-            </a:r>
-          </a:p>
-          <a:p>
-            <a:r>
-              <a:rPr sz="1000"/>
-              <a:t>    → 공정 개선에 대한 언급으로, 개선된 방법이 존재함을 시사한다.</a:t>
-            </a:r>
-          </a:p>
-          <a:p>
-            <a:r>
-              <a:rPr sz="1000"/>
-              <a:t>[A · 구조] “450nm 청색광과 660nm 적색광을 200Hz로 교번 점등하고, 파장별 영상을 합성해 표면 결함과 내부 기공을 한 번의 스캔으로 동시 검출.”</a:t>
-            </a:r>
-          </a:p>
-          <a:p>
-            <a:r>
-              <a:rPr sz="1000"/>
-              <a:t>    → 구체적인 파장, 주파수, 검출 방식이 명시되어 있다.</a:t>
-            </a:r>
-          </a:p>
-          <a:p>
-            <a:r>
-              <a:rPr sz="1000"/>
-              <a:t>[B · 묵시 · 범위한정] “조명 입사각을 22~28° 구간에서 가변한 결과 미세 크랙 대비비가 최대. 24°를 표준 사양으로 확정하고 각도 가변 마운트를 자체 제작.”</a:t>
-            </a:r>
-          </a:p>
-          <a:p>
-            <a:r>
-              <a:rPr sz="1000"/>
-              <a:t>    → 입사각 범위와 최적 조건 확정, 자체 제작 언급으로 기술 개발이 존재함을 시사한다.</a:t>
-            </a:r>
-          </a:p>
-          <a:p>
-            <a:r>
-              <a:rPr sz="1000"/>
-              <a:t>[B · 묵시 · 알고리즘] “코팅 두께 실시간 피드백”</a:t>
-            </a:r>
-          </a:p>
-          <a:p>
-            <a:r>
-              <a:rPr sz="1000"/>
-              <a:t>    → 실시간 피드백이라는 표현으로 제어 수단이 존재함을 시사한다.</a:t>
-            </a:r>
-          </a:p>
-          <a:p>
-            <a:r>
-              <a:rPr sz="1000"/>
-              <a:t>[B · 묵시 · 범위한정] “검사 결과를 코터 슬롯다이 제어기에 200ms 주기로 반영하는 폐루프 구성. 두께 편차 ±0.8㎛ → ±0.3㎛로 축소.”</a:t>
-            </a:r>
-          </a:p>
-          <a:p>
-            <a:r>
-              <a:rPr sz="1000"/>
-              <a:t>    → 두께 편차 개선 효과가 명시되며, 폐루프 구성이라는 표현으로 제어 수단 존재 가능성이 있음.</a:t>
-            </a:r>
-          </a:p>
-          <a:p>
-            <a:r>
-              <a:rPr sz="1000"/>
-              <a:t>[B · 묵시 · 방법] “모듈 원가 구조 개선”</a:t>
-            </a:r>
-          </a:p>
-          <a:p>
-            <a:r>
-              <a:rPr sz="1000"/>
-              <a:t>    → 원가 구조 개선이라는 표현으로, 개선된 방법이 존재함을 시사한다.</a:t>
-            </a:r>
-          </a:p>
-          <a:p>
-            <a:r>
-              <a:rPr sz="1000"/>
-              <a:t>[A · 구조] “라인스캔 카메라 4대 구성을 카메라 2대 + 분광 프리즘 구성으로 대체. 광학 모듈 원가 40% 절감, 설치 폭 320mm 축소.”</a:t>
-            </a:r>
-          </a:p>
-          <a:p>
-            <a:r>
-              <a:rPr sz="1000"/>
-              <a:t>    → 구체적인 구성 변경과 수치적 효과가 명시되어 있다.</a:t>
-            </a:r>
-          </a:p>
-          <a:p>
-            <a:r>
-              <a:rPr sz="1000"/>
-              <a:t>[B · 묵시 · 구조] “광학 모듈 기준”</a:t>
-            </a:r>
-          </a:p>
-          <a:p>
-            <a:r>
-              <a:rPr sz="1000"/>
-              <a:t>    → 기준이라는 표현으로, 특정 구성이 존재함을 시사한다.</a:t>
-            </a:r>
-          </a:p>
-          <a:p>
-            <a:r>
-              <a:rPr sz="1000"/>
-              <a:t>[B · 묵시 · 범위한정] “기존 ±0.8㎛”</a:t>
-            </a:r>
-          </a:p>
-          <a:p>
-            <a:r>
-              <a:rPr sz="1000"/>
-              <a:t>    → 기존 수치가 명시되어 있어, 개선된 수치와 비교 가능성이 있음.</a:t>
-            </a:r>
-          </a:p>
-          <a:p>
-            <a:r>
-              <a:rPr sz="1000"/>
-              <a:t>[B · 묵시 · 범위한정] “△320mm”</a:t>
-            </a:r>
-          </a:p>
-          <a:p>
-            <a:r>
-              <a:rPr sz="1000"/>
-              <a:t>    → 수치적 변화가 명시되어 있어, 개선된 구조가 존재함을 시사한다.</a:t>
-            </a:r>
-          </a:p>
-          <a:p>
-            <a:r>
-              <a:rPr sz="1000"/>
-              <a:t>[B · 묵시 · 효과만기재] “라인 점유 면적 축소”</a:t>
-            </a:r>
-          </a:p>
-          <a:p>
-            <a:r>
-              <a:rPr sz="1000"/>
-              <a:t>    → 면적 축소라는 효과가 명시되어 있어, 이를 가능하게 한 기술이 존재함을 시사한다.</a:t>
-            </a:r>
-          </a:p>
-          <a:p>
-            <a:r>
-              <a:rPr sz="1000"/>
-              <a:t>[B · 묵시 · 독자성주장] “분광 프리즘 배치 구조는 협력사 도면이 아닌 자사 설계이며, 도면 일체를 사내에서 관리 중.”</a:t>
-            </a:r>
-          </a:p>
-          <a:p>
-            <a:r>
-              <a:rPr sz="1000"/>
-              <a:t>    → 자사 설계라는 표현으로, 독자적인 기술이 존재함을 시사한다.</a:t>
-            </a:r>
-          </a:p>
         </p:txBody>
       </p:sp>
       <p:sp>
@@ -1742,145 +1318,6 @@
             </a:r>
             <a:endParaRPr lang="en-US" dirty="0"/>
           </a:p>
-          <a:p/>
-          <a:p>
-            <a:r>
-              <a:rPr sz="1000"/>
-              <a:t>━━━━━━ 출원 검토 마킹 (자동 생성) ━━━━━━</a:t>
-            </a:r>
-          </a:p>
-          <a:p>
-            <a:r>
-              <a:rPr sz="1000"/>
-              <a:t>[B · ⚠공개 · 규칙 · 공개이력] “검사 모듈 12조 설치 및 SOP 승인”</a:t>
-            </a:r>
-          </a:p>
-          <a:p>
-            <a:r>
-              <a:rPr sz="1000"/>
-              <a:t>    → 판매·양산 개시 = 공연실시. 출원 가능 기한이 지났는지 확인 필요 (규칙 사전 감지 · 모델 미판정 구간)</a:t>
-            </a:r>
-          </a:p>
-          <a:p>
-            <a:r>
-              <a:rPr sz="1000"/>
-              <a:t>[B · 블랙박스용어] “원통형 46파이 라인 대응”</a:t>
-            </a:r>
-          </a:p>
-          <a:p>
-            <a:r>
-              <a:rPr sz="1000"/>
-              <a:t>    → 원통형 46파이 라인이라는 기술 용어가 등장하여 해당 기술이 존재함을 시사함</a:t>
-            </a:r>
-          </a:p>
-          <a:p>
-            <a:r>
-              <a:rPr sz="1000"/>
-              <a:t>[B · 블랙박스용어] “곡면 전극용 광학계 파생 모델 개발”</a:t>
-            </a:r>
-          </a:p>
-          <a:p>
-            <a:r>
-              <a:rPr sz="1000"/>
-              <a:t>    → 파생 모델이라는 기술 용어가 등장하여 해당 기술이 존재함을 시사함</a:t>
-            </a:r>
-          </a:p>
-          <a:p>
-            <a:r>
-              <a:rPr sz="1000"/>
-              <a:t>[B · ⚠공개 · 공개이력] “수율 예측 서비스 상용화”</a:t>
-            </a:r>
-          </a:p>
-          <a:p>
-            <a:r>
-              <a:rPr sz="1000"/>
-              <a:t>    → 상용화가 이루어졌으므로, 해당 서비스가 외부에 노출되었음을 시사함</a:t>
-            </a:r>
-          </a:p>
-          <a:p>
-            <a:r>
-              <a:rPr sz="1000"/>
-              <a:t>[B · 블랙박스용어] “누적 검사 데이터 기반 불량 사전 예측”</a:t>
-            </a:r>
-          </a:p>
-          <a:p>
-            <a:r>
-              <a:rPr sz="1000"/>
-              <a:t>    → 불량 사전 예측이라는 기술 용어가 등장하여 해당 기술이 존재함을 시사함</a:t>
-            </a:r>
-          </a:p>
-          <a:p>
-            <a:r>
-              <a:rPr sz="1000"/>
-              <a:t>[B · ⚠공개 · 공개이력] “2단계 캐스케이드 검사 공정을 실물 시연, 동작 화면 및 판정 로직 개요가 참관객에게 노출됨”</a:t>
-            </a:r>
-          </a:p>
-          <a:p>
-            <a:r>
-              <a:rPr sz="1000"/>
-              <a:t>    → 실물 시연 및 판정 로직 개요 노출로 인해 외부에 기술이 노출되었음을 시사함</a:t>
-            </a:r>
-          </a:p>
-          <a:p>
-            <a:r>
-              <a:rPr sz="1000"/>
-              <a:t>[B · ⚠공개 · 블랙박스용어] “동작 화면 및 판정 로직 개요가 참관객에게 노출됨”</a:t>
-            </a:r>
-          </a:p>
-          <a:p>
-            <a:r>
-              <a:rPr sz="1000"/>
-              <a:t>    → 판정 로직 개요가 노출되었으므로, 해당 로직이 존재함을 시사함</a:t>
-            </a:r>
-          </a:p>
-          <a:p>
-            <a:r>
-              <a:rPr sz="1000"/>
-              <a:t>[B · ⚠공개 · 블랙박스용어] “다중 파장 교번 조명 방식의 실험 데이터 포함”</a:t>
-            </a:r>
-          </a:p>
-          <a:p>
-            <a:r>
-              <a:rPr sz="1000"/>
-              <a:t>    → 다중 파장 교번 조명 방식이라는 기술 용어가 등장하여 해당 기술이 존재함을 시사함</a:t>
-            </a:r>
-          </a:p>
-          <a:p>
-            <a:r>
-              <a:rPr sz="1000"/>
-              <a:t>[B · ⚠공개 · 블랙박스용어] “유사한 다중 파장 조명 검사 방식을 2025. 11 공개특허로 등록 공개한 것으로 확인됨”</a:t>
-            </a:r>
-          </a:p>
-          <a:p>
-            <a:r>
-              <a:rPr sz="1000"/>
-              <a:t>    → 다중 파장 조명 검사 방식이라는 기술 용어가 등장하여 해당 기술이 존재함을 시사함</a:t>
-            </a:r>
-          </a:p>
-          <a:p>
-            <a:r>
-              <a:rPr sz="1000"/>
-              <a:t>[B · 독자성주장] “자사 명의의 출원 실적이 없으며, 지식재산 담당 부서의 검토가 진행된 바 없음”</a:t>
-            </a:r>
-          </a:p>
-          <a:p>
-            <a:r>
-              <a:rPr sz="1000"/>
-              <a:t>    → 자사 명의의 출원 실적이 없음을 언급하여, 해당 기술이 존재함을 시사함</a:t>
-            </a:r>
-          </a:p>
-          <a:p>
-            <a:r>
-              <a:rPr sz="1000"/>
-              <a:t>[B · ⚠공개 · 공개이력] “학회 발표는 초록 제출 시점부터 공개로 간주될 수 있으므로, 출원 시점을 8월 중으로 앞당길 필요가 있는지 검토 요청.”</a:t>
-            </a:r>
-          </a:p>
-          <a:p>
-            <a:r>
-              <a:rPr sz="1000"/>
-              <a:t>    → 학회 발표로 인해 기술이 공개될 가능성이 있으므로, 출원 시점 관리가 필요함</a:t>
-            </a:r>
-          </a:p>
         </p:txBody>
       </p:sp>
       <p:sp>
@@ -1912,442 +1349,6 @@
         <p14:creationId xmlns:p14="http://schemas.microsoft.com/office/powerpoint/2010/main" val="1024086991"/>
       </p:ext>
     </p:extLst>
-  </p:cSld>
-  <p:clrMapOvr>
-    <a:masterClrMapping/>
-  </p:clrMapOvr>
-</p:notes>
-</file>
-
-<file path=ppt/notesSlides/notesSlide6.xml><?xml version="1.0" encoding="utf-8"?>
-<p:notes xmlns:a="http://schemas.openxmlformats.org/drawingml/2006/main" xmlns:p="http://schemas.openxmlformats.org/presentationml/2006/main" xmlns:r="http://schemas.openxmlformats.org/officeDocument/2006/relationships">
-  <p:cSld>
-    <p:spTree>
-      <p:nvGrpSpPr>
-        <p:cNvPr id="1" name=""/>
-        <p:cNvGrpSpPr/>
-        <p:nvPr/>
-      </p:nvGrpSpPr>
-      <p:grpSpPr>
-        <a:xfrm>
-          <a:off x="0" y="0"/>
-          <a:ext cx="0" cy="0"/>
-          <a:chOff x="0" y="0"/>
-          <a:chExt cx="0" cy="0"/>
-        </a:xfrm>
-      </p:grpSpPr>
-      <p:sp>
-        <p:nvSpPr>
-          <p:cNvPr id="2" name="Slide Image Placeholder 1"/>
-          <p:cNvSpPr>
-            <a:spLocks noGrp="1"/>
-          </p:cNvSpPr>
-          <p:nvPr>
-            <p:ph type="sldImg" idx="2"/>
-          </p:nvPr>
-        </p:nvSpPr>
-        <p:spPr/>
-      </p:sp>
-      <p:sp>
-        <p:nvSpPr>
-          <p:cNvPr id="3" name="Notes Placeholder 2"/>
-          <p:cNvSpPr>
-            <a:spLocks noGrp="1"/>
-          </p:cNvSpPr>
-          <p:nvPr>
-            <p:ph type="body" idx="3" sz="quarter"/>
-          </p:nvPr>
-        </p:nvSpPr>
-        <p:spPr/>
-        <p:txBody>
-          <a:bodyPr/>
-          <a:lstStyle/>
-          <a:p/>
-          <a:p>
-            <a:r>
-              <a:rPr sz="1000"/>
-              <a:t>【 범례 】</a:t>
-            </a:r>
-          </a:p>
-          <a:p>
-            <a:r>
-              <a:rPr sz="1000"/>
-              <a:t>  ■ A (FFD54F) 즉시 출원 검토 — 구체적 기술 수단이 문면에 드러남</a:t>
-            </a:r>
-          </a:p>
-          <a:p>
-            <a:r>
-              <a:rPr sz="1000"/>
-              <a:t>  ■ B (9FD8F5) 발명 발굴 필요 — 수단은 미기재이나 존재가 시사됨</a:t>
-            </a:r>
-          </a:p>
-          <a:p>
-            <a:r>
-              <a:rPr sz="1000"/>
-              <a:t>  ■ ⚠ (FF9E80) 공개 리스크 — 신규성 상실 우려, 기한 확인 필요</a:t>
-            </a:r>
-          </a:p>
-          <a:p>
-            <a:r>
-              <a:rPr sz="1000"/>
-              <a:t>  형광펜(밑줄) 구간이 출원 검토가 필요한 곳입니다. 색 안내는 첫 슬라이드의 범례 상자에 있습니다.</a:t>
-            </a:r>
-          </a:p>
-          <a:p/>
-          <a:p>
-            <a:r>
-              <a:rPr sz="1000"/>
-              <a:t>본 마킹은 변리사 검토 전 1차 스크리닝 결과입니다.</a:t>
-            </a:r>
-          </a:p>
-          <a:p>
-            <a:r>
-              <a:rPr sz="1000"/>
-              <a:t>선행기술 조사와 신규성·진보성 판단은 포함되어 있지 않습니다.</a:t>
-            </a:r>
-          </a:p>
-        </p:txBody>
-      </p:sp>
-      <p:sp>
-        <p:nvSpPr>
-          <p:cNvPr id="4" name="Slide Number Placeholder 3"/>
-          <p:cNvSpPr>
-            <a:spLocks noGrp="1"/>
-          </p:cNvSpPr>
-          <p:nvPr>
-            <p:ph type="sldNum" idx="5" sz="quarter"/>
-          </p:nvPr>
-        </p:nvSpPr>
-        <p:spPr/>
-      </p:sp>
-    </p:spTree>
-  </p:cSld>
-  <p:clrMapOvr>
-    <a:masterClrMapping/>
-  </p:clrMapOvr>
-</p:notes>
-</file>
-
-<file path=ppt/notesSlides/notesSlide7.xml><?xml version="1.0" encoding="utf-8"?>
-<p:notes xmlns:a="http://schemas.openxmlformats.org/drawingml/2006/main" xmlns:p="http://schemas.openxmlformats.org/presentationml/2006/main" xmlns:r="http://schemas.openxmlformats.org/officeDocument/2006/relationships">
-  <p:cSld>
-    <p:spTree>
-      <p:nvGrpSpPr>
-        <p:cNvPr id="1" name=""/>
-        <p:cNvGrpSpPr/>
-        <p:nvPr/>
-      </p:nvGrpSpPr>
-      <p:grpSpPr>
-        <a:xfrm>
-          <a:off x="0" y="0"/>
-          <a:ext cx="0" cy="0"/>
-          <a:chOff x="0" y="0"/>
-          <a:chExt cx="0" cy="0"/>
-        </a:xfrm>
-      </p:grpSpPr>
-      <p:sp>
-        <p:nvSpPr>
-          <p:cNvPr id="2" name="Slide Image Placeholder 1"/>
-          <p:cNvSpPr>
-            <a:spLocks noGrp="1"/>
-          </p:cNvSpPr>
-          <p:nvPr>
-            <p:ph type="sldImg" idx="2"/>
-          </p:nvPr>
-        </p:nvSpPr>
-        <p:spPr/>
-      </p:sp>
-      <p:sp>
-        <p:nvSpPr>
-          <p:cNvPr id="3" name="Notes Placeholder 2"/>
-          <p:cNvSpPr>
-            <a:spLocks noGrp="1"/>
-          </p:cNvSpPr>
-          <p:nvPr>
-            <p:ph type="body" idx="3" sz="quarter"/>
-          </p:nvPr>
-        </p:nvSpPr>
-        <p:spPr/>
-        <p:txBody>
-          <a:bodyPr/>
-          <a:lstStyle/>
-          <a:p/>
-          <a:p>
-            <a:r>
-              <a:rPr sz="1000"/>
-              <a:t>【 범례 】</a:t>
-            </a:r>
-          </a:p>
-          <a:p>
-            <a:r>
-              <a:rPr sz="1000"/>
-              <a:t>  ■ A (FFD54F) 즉시 출원 검토 — 구체적 기술 수단이 문면에 드러남</a:t>
-            </a:r>
-          </a:p>
-          <a:p>
-            <a:r>
-              <a:rPr sz="1000"/>
-              <a:t>  ■ B (9FD8F5) 발명 발굴 필요 — 수단은 미기재이나 존재가 시사됨</a:t>
-            </a:r>
-          </a:p>
-          <a:p>
-            <a:r>
-              <a:rPr sz="1000"/>
-              <a:t>  ■ ⚠ (FF9E80) 공개 리스크 — 신규성 상실 우려, 기한 확인 필요</a:t>
-            </a:r>
-          </a:p>
-          <a:p>
-            <a:r>
-              <a:rPr sz="1000"/>
-              <a:t>  형광펜(밑줄) 구간이 출원 검토가 필요한 곳입니다. 색 안내는 첫 슬라이드의 범례 상자에 있습니다.</a:t>
-            </a:r>
-          </a:p>
-          <a:p/>
-          <a:p>
-            <a:r>
-              <a:rPr sz="1000"/>
-              <a:t>본 마킹은 변리사 검토 전 1차 스크리닝 결과입니다.</a:t>
-            </a:r>
-          </a:p>
-          <a:p>
-            <a:r>
-              <a:rPr sz="1000"/>
-              <a:t>선행기술 조사와 신규성·진보성 판단은 포함되어 있지 않습니다.</a:t>
-            </a:r>
-          </a:p>
-        </p:txBody>
-      </p:sp>
-      <p:sp>
-        <p:nvSpPr>
-          <p:cNvPr id="4" name="Slide Number Placeholder 3"/>
-          <p:cNvSpPr>
-            <a:spLocks noGrp="1"/>
-          </p:cNvSpPr>
-          <p:nvPr>
-            <p:ph type="sldNum" idx="5" sz="quarter"/>
-          </p:nvPr>
-        </p:nvSpPr>
-        <p:spPr/>
-      </p:sp>
-    </p:spTree>
-  </p:cSld>
-  <p:clrMapOvr>
-    <a:masterClrMapping/>
-  </p:clrMapOvr>
-</p:notes>
-</file>
-
-<file path=ppt/notesSlides/notesSlide8.xml><?xml version="1.0" encoding="utf-8"?>
-<p:notes xmlns:a="http://schemas.openxmlformats.org/drawingml/2006/main" xmlns:p="http://schemas.openxmlformats.org/presentationml/2006/main" xmlns:r="http://schemas.openxmlformats.org/officeDocument/2006/relationships">
-  <p:cSld>
-    <p:spTree>
-      <p:nvGrpSpPr>
-        <p:cNvPr id="1" name=""/>
-        <p:cNvGrpSpPr/>
-        <p:nvPr/>
-      </p:nvGrpSpPr>
-      <p:grpSpPr>
-        <a:xfrm>
-          <a:off x="0" y="0"/>
-          <a:ext cx="0" cy="0"/>
-          <a:chOff x="0" y="0"/>
-          <a:chExt cx="0" cy="0"/>
-        </a:xfrm>
-      </p:grpSpPr>
-      <p:sp>
-        <p:nvSpPr>
-          <p:cNvPr id="2" name="Slide Image Placeholder 1"/>
-          <p:cNvSpPr>
-            <a:spLocks noGrp="1"/>
-          </p:cNvSpPr>
-          <p:nvPr>
-            <p:ph type="sldImg" idx="2"/>
-          </p:nvPr>
-        </p:nvSpPr>
-        <p:spPr/>
-      </p:sp>
-      <p:sp>
-        <p:nvSpPr>
-          <p:cNvPr id="3" name="Notes Placeholder 2"/>
-          <p:cNvSpPr>
-            <a:spLocks noGrp="1"/>
-          </p:cNvSpPr>
-          <p:nvPr>
-            <p:ph type="body" idx="3" sz="quarter"/>
-          </p:nvPr>
-        </p:nvSpPr>
-        <p:spPr/>
-        <p:txBody>
-          <a:bodyPr/>
-          <a:lstStyle/>
-          <a:p/>
-          <a:p>
-            <a:r>
-              <a:rPr sz="1000"/>
-              <a:t>【 범례 】</a:t>
-            </a:r>
-          </a:p>
-          <a:p>
-            <a:r>
-              <a:rPr sz="1000"/>
-              <a:t>  ■ A (FFD54F) 즉시 출원 검토 — 구체적 기술 수단이 문면에 드러남</a:t>
-            </a:r>
-          </a:p>
-          <a:p>
-            <a:r>
-              <a:rPr sz="1000"/>
-              <a:t>  ■ B (9FD8F5) 발명 발굴 필요 — 수단은 미기재이나 존재가 시사됨</a:t>
-            </a:r>
-          </a:p>
-          <a:p>
-            <a:r>
-              <a:rPr sz="1000"/>
-              <a:t>  ■ ⚠ (FF9E80) 공개 리스크 — 신규성 상실 우려, 기한 확인 필요</a:t>
-            </a:r>
-          </a:p>
-          <a:p>
-            <a:r>
-              <a:rPr sz="1000"/>
-              <a:t>  형광펜(밑줄) 구간이 출원 검토가 필요한 곳입니다. 색 안내는 첫 슬라이드의 범례 상자에 있습니다.</a:t>
-            </a:r>
-          </a:p>
-          <a:p/>
-          <a:p>
-            <a:r>
-              <a:rPr sz="1000"/>
-              <a:t>본 마킹은 변리사 검토 전 1차 스크리닝 결과입니다.</a:t>
-            </a:r>
-          </a:p>
-          <a:p>
-            <a:r>
-              <a:rPr sz="1000"/>
-              <a:t>선행기술 조사와 신규성·진보성 판단은 포함되어 있지 않습니다.</a:t>
-            </a:r>
-          </a:p>
-        </p:txBody>
-      </p:sp>
-      <p:sp>
-        <p:nvSpPr>
-          <p:cNvPr id="4" name="Slide Number Placeholder 3"/>
-          <p:cNvSpPr>
-            <a:spLocks noGrp="1"/>
-          </p:cNvSpPr>
-          <p:nvPr>
-            <p:ph type="sldNum" idx="5" sz="quarter"/>
-          </p:nvPr>
-        </p:nvSpPr>
-        <p:spPr/>
-      </p:sp>
-    </p:spTree>
-  </p:cSld>
-  <p:clrMapOvr>
-    <a:masterClrMapping/>
-  </p:clrMapOvr>
-</p:notes>
-</file>
-
-<file path=ppt/notesSlides/notesSlide9.xml><?xml version="1.0" encoding="utf-8"?>
-<p:notes xmlns:a="http://schemas.openxmlformats.org/drawingml/2006/main" xmlns:p="http://schemas.openxmlformats.org/presentationml/2006/main" xmlns:r="http://schemas.openxmlformats.org/officeDocument/2006/relationships">
-  <p:cSld>
-    <p:spTree>
-      <p:nvGrpSpPr>
-        <p:cNvPr id="1" name=""/>
-        <p:cNvGrpSpPr/>
-        <p:nvPr/>
-      </p:nvGrpSpPr>
-      <p:grpSpPr>
-        <a:xfrm>
-          <a:off x="0" y="0"/>
-          <a:ext cx="0" cy="0"/>
-          <a:chOff x="0" y="0"/>
-          <a:chExt cx="0" cy="0"/>
-        </a:xfrm>
-      </p:grpSpPr>
-      <p:sp>
-        <p:nvSpPr>
-          <p:cNvPr id="2" name="Slide Image Placeholder 1"/>
-          <p:cNvSpPr>
-            <a:spLocks noGrp="1"/>
-          </p:cNvSpPr>
-          <p:nvPr>
-            <p:ph type="sldImg" idx="2"/>
-          </p:nvPr>
-        </p:nvSpPr>
-        <p:spPr/>
-      </p:sp>
-      <p:sp>
-        <p:nvSpPr>
-          <p:cNvPr id="3" name="Notes Placeholder 2"/>
-          <p:cNvSpPr>
-            <a:spLocks noGrp="1"/>
-          </p:cNvSpPr>
-          <p:nvPr>
-            <p:ph type="body" idx="3" sz="quarter"/>
-          </p:nvPr>
-        </p:nvSpPr>
-        <p:spPr/>
-        <p:txBody>
-          <a:bodyPr/>
-          <a:lstStyle/>
-          <a:p/>
-          <a:p>
-            <a:r>
-              <a:rPr sz="1000"/>
-              <a:t>【 범례 】</a:t>
-            </a:r>
-          </a:p>
-          <a:p>
-            <a:r>
-              <a:rPr sz="1000"/>
-              <a:t>  ■ A (FFD54F) 즉시 출원 검토 — 구체적 기술 수단이 문면에 드러남</a:t>
-            </a:r>
-          </a:p>
-          <a:p>
-            <a:r>
-              <a:rPr sz="1000"/>
-              <a:t>  ■ B (9FD8F5) 발명 발굴 필요 — 수단은 미기재이나 존재가 시사됨</a:t>
-            </a:r>
-          </a:p>
-          <a:p>
-            <a:r>
-              <a:rPr sz="1000"/>
-              <a:t>  ■ ⚠ (FF9E80) 공개 리스크 — 신규성 상실 우려, 기한 확인 필요</a:t>
-            </a:r>
-          </a:p>
-          <a:p>
-            <a:r>
-              <a:rPr sz="1000"/>
-              <a:t>  형광펜(밑줄) 구간이 출원 검토가 필요한 곳입니다. 색 안내는 첫 슬라이드의 범례 상자에 있습니다.</a:t>
-            </a:r>
-          </a:p>
-          <a:p/>
-          <a:p>
-            <a:r>
-              <a:rPr sz="1000"/>
-              <a:t>본 마킹은 변리사 검토 전 1차 스크리닝 결과입니다.</a:t>
-            </a:r>
-          </a:p>
-          <a:p>
-            <a:r>
-              <a:rPr sz="1000"/>
-              <a:t>선행기술 조사와 신규성·진보성 판단은 포함되어 있지 않습니다.</a:t>
-            </a:r>
-          </a:p>
-        </p:txBody>
-      </p:sp>
-      <p:sp>
-        <p:nvSpPr>
-          <p:cNvPr id="4" name="Slide Number Placeholder 3"/>
-          <p:cNvSpPr>
-            <a:spLocks noGrp="1"/>
-          </p:cNvSpPr>
-          <p:nvPr>
-            <p:ph type="sldNum" idx="5" sz="quarter"/>
-          </p:nvPr>
-        </p:nvSpPr>
-        <p:spPr/>
-      </p:sp>
-    </p:spTree>
   </p:cSld>
   <p:clrMapOvr>
     <a:masterClrMapping/>
@@ -3383,23 +2384,25 @@
       </p:sp>
       <p:sp>
         <p:nvSpPr>
-          <p:cNvPr id="21" name="출원검토필요 배지"/>
-          <p:cNvSpPr/>
-          <p:nvPr/>
-        </p:nvSpPr>
-        <p:spPr>
-          <a:xfrm>
-            <a:off x="10271760" y="109728"/>
-            <a:ext cx="1737360" cy="310896"/>
+          <p:cNvPr id="21" name="출원검토필요 범례"/>
+          <p:cNvSpPr/>
+          <p:nvPr/>
+        </p:nvSpPr>
+        <p:spPr>
+          <a:xfrm>
+            <a:off x="5943600" y="228600"/>
+            <a:ext cx="3794760" cy="1261872"/>
           </a:xfrm>
           <a:prstGeom prst="roundRect">
             <a:avLst/>
           </a:prstGeom>
           <a:solidFill>
-            <a:srgbClr val="C62828"/>
+            <a:srgbClr val="FFFFFF"/>
           </a:solidFill>
-          <a:ln>
-            <a:noFill/>
+          <a:ln w="12700">
+            <a:solidFill>
+              <a:srgbClr val="C62828"/>
+            </a:solidFill>
           </a:ln>
           <a:effectLst/>
         </p:spPr>
@@ -3418,60 +2421,6 @@
           </a:fontRef>
         </p:style>
         <p:txBody>
-          <a:bodyPr rtlCol="0" anchor="ctr" lIns="73152" rIns="73152" tIns="18288" bIns="18288"/>
-          <a:lstStyle/>
-          <a:p>
-            <a:pPr algn="ctr"/>
-            <a:r>
-              <a:rPr sz="1050" b="1">
-                <a:solidFill>
-                  <a:srgbClr val="FFFFFF"/>
-                </a:solidFill>
-              </a:rPr>
-              <a:t>출원검토필요 2건</a:t>
-            </a:r>
-          </a:p>
-        </p:txBody>
-      </p:sp>
-      <p:sp>
-        <p:nvSpPr>
-          <p:cNvPr id="22" name="출원검토필요 범례"/>
-          <p:cNvSpPr/>
-          <p:nvPr/>
-        </p:nvSpPr>
-        <p:spPr>
-          <a:xfrm>
-            <a:off x="5943600" y="228600"/>
-            <a:ext cx="3794760" cy="1261872"/>
-          </a:xfrm>
-          <a:prstGeom prst="roundRect">
-            <a:avLst/>
-          </a:prstGeom>
-          <a:solidFill>
-            <a:srgbClr val="FFFFFF"/>
-          </a:solidFill>
-          <a:ln w="12700">
-            <a:solidFill>
-              <a:srgbClr val="C62828"/>
-            </a:solidFill>
-          </a:ln>
-          <a:effectLst/>
-        </p:spPr>
-        <p:style>
-          <a:lnRef idx="1">
-            <a:schemeClr val="accent1"/>
-          </a:lnRef>
-          <a:fillRef idx="3">
-            <a:schemeClr val="accent1"/>
-          </a:fillRef>
-          <a:effectRef idx="2">
-            <a:schemeClr val="accent1"/>
-          </a:effectRef>
-          <a:fontRef idx="minor">
-            <a:schemeClr val="lt1"/>
-          </a:fontRef>
-        </p:style>
-        <p:txBody>
           <a:bodyPr rtlCol="0" anchor="ctr" wrap="square" lIns="109728" rIns="109728" tIns="54864" bIns="54864"/>
           <a:lstStyle/>
           <a:p>
@@ -3555,7 +2504,7 @@
                   </a:solidFill>
                 </a:uFill>
               </a:rPr>
-              <a:t> ⚠ </a:t>
+              <a:t> C </a:t>
             </a:r>
             <a:r>
               <a:rPr sz="900">
@@ -3563,7 +2512,7 @@
                   <a:srgbClr val="141A22"/>
                 </a:solidFill>
               </a:rPr>
-              <a:t>  공개 리스크 — 전시·논문 등 이미 공개된 내용</a:t>
+              <a:t>  공개전 출원완료 필요</a:t>
             </a:r>
           </a:p>
           <a:p>
@@ -3585,7 +2534,7 @@
                   <a:srgbClr val="5F6B7A"/>
                 </a:solidFill>
               </a:rPr>
-              <a:t>근거: 발표자 노트  ·  전체 목록: 마지막 슬라이드</a:t>
+              <a:t>변리사 검토 전 1차 스크리닝 결과</a:t>
             </a:r>
           </a:p>
         </p:txBody>
@@ -4322,58 +3271,6 @@
           </a:p>
         </p:txBody>
       </p:sp>
-      <p:sp>
-        <p:nvSpPr>
-          <p:cNvPr id="19" name="출원검토필요 배지"/>
-          <p:cNvSpPr/>
-          <p:nvPr/>
-        </p:nvSpPr>
-        <p:spPr>
-          <a:xfrm>
-            <a:off x="10271760" y="109728"/>
-            <a:ext cx="1737360" cy="310896"/>
-          </a:xfrm>
-          <a:prstGeom prst="roundRect">
-            <a:avLst/>
-          </a:prstGeom>
-          <a:solidFill>
-            <a:srgbClr val="C62828"/>
-          </a:solidFill>
-          <a:ln>
-            <a:noFill/>
-          </a:ln>
-          <a:effectLst/>
-        </p:spPr>
-        <p:style>
-          <a:lnRef idx="1">
-            <a:schemeClr val="accent1"/>
-          </a:lnRef>
-          <a:fillRef idx="3">
-            <a:schemeClr val="accent1"/>
-          </a:fillRef>
-          <a:effectRef idx="2">
-            <a:schemeClr val="accent1"/>
-          </a:effectRef>
-          <a:fontRef idx="minor">
-            <a:schemeClr val="lt1"/>
-          </a:fontRef>
-        </p:style>
-        <p:txBody>
-          <a:bodyPr rtlCol="0" anchor="ctr" lIns="73152" rIns="73152" tIns="18288" bIns="18288"/>
-          <a:lstStyle/>
-          <a:p>
-            <a:pPr algn="ctr"/>
-            <a:r>
-              <a:rPr sz="1050" b="1">
-                <a:solidFill>
-                  <a:srgbClr val="FFFFFF"/>
-                </a:solidFill>
-              </a:rPr>
-              <a:t>출원검토필요 4건</a:t>
-            </a:r>
-          </a:p>
-        </p:txBody>
-      </p:sp>
     </p:spTree>
   </p:cSld>
   <p:clrMapOvr>
@@ -6018,58 +4915,6 @@
           </a:p>
         </p:txBody>
       </p:sp>
-      <p:sp>
-        <p:nvSpPr>
-          <p:cNvPr id="35" name="출원검토필요 배지"/>
-          <p:cNvSpPr/>
-          <p:nvPr/>
-        </p:nvSpPr>
-        <p:spPr>
-          <a:xfrm>
-            <a:off x="10271760" y="109728"/>
-            <a:ext cx="1737360" cy="310896"/>
-          </a:xfrm>
-          <a:prstGeom prst="roundRect">
-            <a:avLst/>
-          </a:prstGeom>
-          <a:solidFill>
-            <a:srgbClr val="C62828"/>
-          </a:solidFill>
-          <a:ln>
-            <a:noFill/>
-          </a:ln>
-          <a:effectLst/>
-        </p:spPr>
-        <p:style>
-          <a:lnRef idx="1">
-            <a:schemeClr val="accent1"/>
-          </a:lnRef>
-          <a:fillRef idx="3">
-            <a:schemeClr val="accent1"/>
-          </a:fillRef>
-          <a:effectRef idx="2">
-            <a:schemeClr val="accent1"/>
-          </a:effectRef>
-          <a:fontRef idx="minor">
-            <a:schemeClr val="lt1"/>
-          </a:fontRef>
-        </p:style>
-        <p:txBody>
-          <a:bodyPr rtlCol="0" anchor="ctr" lIns="73152" rIns="73152" tIns="18288" bIns="18288"/>
-          <a:lstStyle/>
-          <a:p>
-            <a:pPr algn="ctr"/>
-            <a:r>
-              <a:rPr sz="1050" b="1">
-                <a:solidFill>
-                  <a:srgbClr val="FFFFFF"/>
-                </a:solidFill>
-              </a:rPr>
-              <a:t>출원검토필요 11건</a:t>
-            </a:r>
-          </a:p>
-        </p:txBody>
-      </p:sp>
     </p:spTree>
   </p:cSld>
   <p:clrMapOvr>
@@ -7574,58 +6419,6 @@
           </a:p>
         </p:txBody>
       </p:sp>
-      <p:sp>
-        <p:nvSpPr>
-          <p:cNvPr id="40" name="출원검토필요 배지"/>
-          <p:cNvSpPr/>
-          <p:nvPr/>
-        </p:nvSpPr>
-        <p:spPr>
-          <a:xfrm>
-            <a:off x="10271760" y="109728"/>
-            <a:ext cx="1737360" cy="310896"/>
-          </a:xfrm>
-          <a:prstGeom prst="roundRect">
-            <a:avLst/>
-          </a:prstGeom>
-          <a:solidFill>
-            <a:srgbClr val="C62828"/>
-          </a:solidFill>
-          <a:ln>
-            <a:noFill/>
-          </a:ln>
-          <a:effectLst/>
-        </p:spPr>
-        <p:style>
-          <a:lnRef idx="1">
-            <a:schemeClr val="accent1"/>
-          </a:lnRef>
-          <a:fillRef idx="3">
-            <a:schemeClr val="accent1"/>
-          </a:fillRef>
-          <a:effectRef idx="2">
-            <a:schemeClr val="accent1"/>
-          </a:effectRef>
-          <a:fontRef idx="minor">
-            <a:schemeClr val="lt1"/>
-          </a:fontRef>
-        </p:style>
-        <p:txBody>
-          <a:bodyPr rtlCol="0" anchor="ctr" lIns="73152" rIns="73152" tIns="18288" bIns="18288"/>
-          <a:lstStyle/>
-          <a:p>
-            <a:pPr algn="ctr"/>
-            <a:r>
-              <a:rPr sz="1050" b="1">
-                <a:solidFill>
-                  <a:srgbClr val="FFFFFF"/>
-                </a:solidFill>
-              </a:rPr>
-              <a:t>출원검토필요 12건</a:t>
-            </a:r>
-          </a:p>
-        </p:txBody>
-      </p:sp>
     </p:spTree>
   </p:cSld>
   <p:clrMapOvr>
@@ -8553,810 +7346,6 @@
               <a:t>5</a:t>
             </a:r>
             <a:endParaRPr lang="en-US" sz="900" dirty="0"/>
-          </a:p>
-        </p:txBody>
-      </p:sp>
-      <p:sp>
-        <p:nvSpPr>
-          <p:cNvPr id="21" name="출원검토필요 배지"/>
-          <p:cNvSpPr/>
-          <p:nvPr/>
-        </p:nvSpPr>
-        <p:spPr>
-          <a:xfrm>
-            <a:off x="10271760" y="109728"/>
-            <a:ext cx="1737360" cy="310896"/>
-          </a:xfrm>
-          <a:prstGeom prst="roundRect">
-            <a:avLst/>
-          </a:prstGeom>
-          <a:solidFill>
-            <a:srgbClr val="C62828"/>
-          </a:solidFill>
-          <a:ln>
-            <a:noFill/>
-          </a:ln>
-          <a:effectLst/>
-        </p:spPr>
-        <p:style>
-          <a:lnRef idx="1">
-            <a:schemeClr val="accent1"/>
-          </a:lnRef>
-          <a:fillRef idx="3">
-            <a:schemeClr val="accent1"/>
-          </a:fillRef>
-          <a:effectRef idx="2">
-            <a:schemeClr val="accent1"/>
-          </a:effectRef>
-          <a:fontRef idx="minor">
-            <a:schemeClr val="lt1"/>
-          </a:fontRef>
-        </p:style>
-        <p:txBody>
-          <a:bodyPr rtlCol="0" anchor="ctr" lIns="73152" rIns="73152" tIns="18288" bIns="18288"/>
-          <a:lstStyle/>
-          <a:p>
-            <a:pPr algn="ctr"/>
-            <a:r>
-              <a:rPr sz="1050" b="1">
-                <a:solidFill>
-                  <a:srgbClr val="FFFFFF"/>
-                </a:solidFill>
-              </a:rPr>
-              <a:t>출원검토필요 11건</a:t>
-            </a:r>
-          </a:p>
-        </p:txBody>
-      </p:sp>
-    </p:spTree>
-  </p:cSld>
-  <p:clrMapOvr>
-    <a:masterClrMapping/>
-  </p:clrMapOvr>
-</p:sld>
-</file>
-
-<file path=ppt/slides/slide6.xml><?xml version="1.0" encoding="utf-8"?>
-<p:sld xmlns:a="http://schemas.openxmlformats.org/drawingml/2006/main" xmlns:p="http://schemas.openxmlformats.org/presentationml/2006/main" xmlns:r="http://schemas.openxmlformats.org/officeDocument/2006/relationships">
-  <p:cSld>
-    <p:spTree>
-      <p:nvGrpSpPr>
-        <p:cNvPr id="1" name=""/>
-        <p:cNvGrpSpPr/>
-        <p:nvPr/>
-      </p:nvGrpSpPr>
-      <p:grpSpPr/>
-      <p:sp>
-        <p:nvSpPr>
-          <p:cNvPr id="2" name="TextBox 1"/>
-          <p:cNvSpPr txBox="1"/>
-          <p:nvPr/>
-        </p:nvSpPr>
-        <p:spPr>
-          <a:xfrm>
-            <a:off x="548640" y="411480"/>
-            <a:ext cx="11094720" cy="457200"/>
-          </a:xfrm>
-          <a:prstGeom prst="rect">
-            <a:avLst/>
-          </a:prstGeom>
-          <a:noFill/>
-        </p:spPr>
-        <p:txBody>
-          <a:bodyPr wrap="none">
-            <a:spAutoFit/>
-          </a:bodyPr>
-          <a:lstStyle/>
-          <a:p>
-            <a:r>
-              <a:rPr sz="2400" b="1"/>
-              <a:t>출원 검토 마킹 요약 (1/4)</a:t>
-            </a:r>
-          </a:p>
-        </p:txBody>
-      </p:sp>
-      <p:sp>
-        <p:nvSpPr>
-          <p:cNvPr id="3" name="TextBox 2"/>
-          <p:cNvSpPr txBox="1"/>
-          <p:nvPr/>
-        </p:nvSpPr>
-        <p:spPr>
-          <a:xfrm>
-            <a:off x="548640" y="914400"/>
-            <a:ext cx="11094720" cy="292608"/>
-          </a:xfrm>
-          <a:prstGeom prst="rect">
-            <a:avLst/>
-          </a:prstGeom>
-          <a:noFill/>
-        </p:spPr>
-        <p:txBody>
-          <a:bodyPr wrap="none">
-            <a:spAutoFit/>
-          </a:bodyPr>
-          <a:lstStyle/>
-          <a:p>
-            <a:r>
-              <a:rPr sz="1200"/>
-              <a:t>A(즉시 출원 검토) 6건   ·   B(발명 발굴 필요) 33건   ·   ⚠ 공개 리스크 11건</a:t>
-            </a:r>
-          </a:p>
-        </p:txBody>
-      </p:sp>
-      <p:sp>
-        <p:nvSpPr>
-          <p:cNvPr id="4" name="TextBox 3"/>
-          <p:cNvSpPr txBox="1"/>
-          <p:nvPr/>
-        </p:nvSpPr>
-        <p:spPr>
-          <a:xfrm>
-            <a:off x="548640" y="1325880"/>
-            <a:ext cx="11094720" cy="4754880"/>
-          </a:xfrm>
-          <a:prstGeom prst="rect">
-            <a:avLst/>
-          </a:prstGeom>
-          <a:noFill/>
-        </p:spPr>
-        <p:txBody>
-          <a:bodyPr wrap="square">
-            <a:spAutoFit/>
-          </a:bodyPr>
-          <a:lstStyle/>
-          <a:p>
-            <a:r>
-              <a:rPr sz="1100"/>
-              <a:t>p1  [B·묵시]  공개이력  |  관련 기술 특허 출원</a:t>
-            </a:r>
-          </a:p>
-          <a:p>
-            <a:r>
-              <a:rPr sz="1100"/>
-              <a:t>p1  [C·⚠공개]  공개이력  |  일부 내용은 이미 외부에 공개된 이력이 있음</a:t>
-            </a:r>
-          </a:p>
-          <a:p>
-            <a:r>
-              <a:rPr sz="1100"/>
-              <a:t>p2  [B·묵시]  구조  |  조립·물류 장비 중심 구조에서 검사 솔루션 중심으로 이동 중</a:t>
-            </a:r>
-          </a:p>
-          <a:p>
-            <a:r>
-              <a:rPr sz="1100"/>
-              <a:t>p2  [B·묵시·⚠공개]  범위한정  |  검사 모듈 12조 공급 확정</a:t>
-            </a:r>
-          </a:p>
-          <a:p>
-            <a:r>
-              <a:rPr sz="1100"/>
-              <a:t>p2  [B·묵시·⚠공개]  공개이력  |  2026년 3분기 현장 검증(SOP) 예정</a:t>
-            </a:r>
-          </a:p>
-          <a:p>
-            <a:r>
-              <a:rPr sz="1100"/>
-              <a:t>p2  [B·묵시]  범위한정  |  광학 모듈 원가 절감 효과</a:t>
-            </a:r>
-          </a:p>
-          <a:p>
-            <a:r>
-              <a:rPr sz="1100"/>
-              <a:t>p3  [B·묵시]  알고리즘  |  실시간 전극 결함 검출 알고리즘</a:t>
-            </a:r>
-          </a:p>
-          <a:p>
-            <a:r>
-              <a:rPr sz="1100"/>
-              <a:t>p3  [A]  구조  |  추론 부하를 2단계로 분리한 캐스케이드 구조를 신규 설계함</a:t>
-            </a:r>
-          </a:p>
-          <a:p>
-            <a:r>
-              <a:rPr sz="1100"/>
-              <a:t>p3  [A]  알고리즘  |  1차 모델은 정상 판정에만 특화된 경량 CNN으로, 정상 프레임을 즉시 배제해 2차 모델의 입력량…</a:t>
-            </a:r>
-          </a:p>
-          <a:p>
-            <a:r>
-              <a:rPr sz="1100"/>
-              <a:t>p3  [A]  방법  |  결함 샘플 희소성 문제는 실 결함 1장당 합성 결함 200장을 생성하는 증강 파이프라인으로 보완 …</a:t>
-            </a:r>
-          </a:p>
-          <a:p>
-            <a:r>
-              <a:rPr sz="1100"/>
-              <a:t>p3  [B·묵시]  범위한정  |  라인 속도 120 m/min 조건에서 20㎛급 미세 결함까지 검출 가능</a:t>
-            </a:r>
-          </a:p>
-          <a:p>
-            <a:r>
-              <a:rPr sz="1100"/>
-              <a:t>p3  [A]  알고리즘  |  판정 임계값을 직전 500프레임의 결함 밀도에 따라 자동 조정하는 적응형 임계 방식 적용</a:t>
-            </a:r>
-          </a:p>
-          <a:p>
-            <a:r>
-              <a:rPr sz="1100"/>
-              <a:t>p3  [B·묵시]  범위한정  |  4.2%   →   0.7%</a:t>
-            </a:r>
-          </a:p>
-        </p:txBody>
-      </p:sp>
-      <p:sp>
-        <p:nvSpPr>
-          <p:cNvPr id="5" name="TextBox 4"/>
-          <p:cNvSpPr txBox="1"/>
-          <p:nvPr/>
-        </p:nvSpPr>
-        <p:spPr>
-          <a:xfrm>
-            <a:off x="548640" y="6172200"/>
-            <a:ext cx="11094720" cy="274320"/>
-          </a:xfrm>
-          <a:prstGeom prst="rect">
-            <a:avLst/>
-          </a:prstGeom>
-          <a:noFill/>
-        </p:spPr>
-        <p:txBody>
-          <a:bodyPr wrap="none">
-            <a:spAutoFit/>
-          </a:bodyPr>
-          <a:lstStyle/>
-          <a:p>
-            <a:r>
-              <a:rPr sz="900"/>
-              <a:t>자동 스크리닝 결과 · 변리사 검토 전 1차 후보 · 선행기술 조사 및 신규성·진보성 판단 미포함</a:t>
-            </a:r>
-          </a:p>
-        </p:txBody>
-      </p:sp>
-    </p:spTree>
-  </p:cSld>
-  <p:clrMapOvr>
-    <a:masterClrMapping/>
-  </p:clrMapOvr>
-</p:sld>
-</file>
-
-<file path=ppt/slides/slide7.xml><?xml version="1.0" encoding="utf-8"?>
-<p:sld xmlns:a="http://schemas.openxmlformats.org/drawingml/2006/main" xmlns:p="http://schemas.openxmlformats.org/presentationml/2006/main" xmlns:r="http://schemas.openxmlformats.org/officeDocument/2006/relationships">
-  <p:cSld>
-    <p:spTree>
-      <p:nvGrpSpPr>
-        <p:cNvPr id="1" name=""/>
-        <p:cNvGrpSpPr/>
-        <p:nvPr/>
-      </p:nvGrpSpPr>
-      <p:grpSpPr/>
-      <p:sp>
-        <p:nvSpPr>
-          <p:cNvPr id="2" name="TextBox 1"/>
-          <p:cNvSpPr txBox="1"/>
-          <p:nvPr/>
-        </p:nvSpPr>
-        <p:spPr>
-          <a:xfrm>
-            <a:off x="548640" y="411480"/>
-            <a:ext cx="11094720" cy="457200"/>
-          </a:xfrm>
-          <a:prstGeom prst="rect">
-            <a:avLst/>
-          </a:prstGeom>
-          <a:noFill/>
-        </p:spPr>
-        <p:txBody>
-          <a:bodyPr wrap="none">
-            <a:spAutoFit/>
-          </a:bodyPr>
-          <a:lstStyle/>
-          <a:p>
-            <a:r>
-              <a:rPr sz="2400" b="1"/>
-              <a:t>출원 검토 마킹 요약 (2/4)</a:t>
-            </a:r>
-          </a:p>
-        </p:txBody>
-      </p:sp>
-      <p:sp>
-        <p:nvSpPr>
-          <p:cNvPr id="3" name="TextBox 2"/>
-          <p:cNvSpPr txBox="1"/>
-          <p:nvPr/>
-        </p:nvSpPr>
-        <p:spPr>
-          <a:xfrm>
-            <a:off x="548640" y="914400"/>
-            <a:ext cx="11094720" cy="292608"/>
-          </a:xfrm>
-          <a:prstGeom prst="rect">
-            <a:avLst/>
-          </a:prstGeom>
-          <a:noFill/>
-        </p:spPr>
-        <p:txBody>
-          <a:bodyPr wrap="none">
-            <a:spAutoFit/>
-          </a:bodyPr>
-          <a:lstStyle/>
-          <a:p>
-            <a:r>
-              <a:rPr sz="1200"/>
-              <a:t>A(즉시 출원 검토) 6건   ·   B(발명 발굴 필요) 33건   ·   ⚠ 공개 리스크 11건</a:t>
-            </a:r>
-          </a:p>
-        </p:txBody>
-      </p:sp>
-      <p:sp>
-        <p:nvSpPr>
-          <p:cNvPr id="4" name="TextBox 3"/>
-          <p:cNvSpPr txBox="1"/>
-          <p:nvPr/>
-        </p:nvSpPr>
-        <p:spPr>
-          <a:xfrm>
-            <a:off x="548640" y="1325880"/>
-            <a:ext cx="11094720" cy="4754880"/>
-          </a:xfrm>
-          <a:prstGeom prst="rect">
-            <a:avLst/>
-          </a:prstGeom>
-          <a:noFill/>
-        </p:spPr>
-        <p:txBody>
-          <a:bodyPr wrap="square">
-            <a:spAutoFit/>
-          </a:bodyPr>
-          <a:lstStyle/>
-          <a:p>
-            <a:r>
-              <a:rPr sz="1100"/>
-              <a:t>p3  [B·묵시]  알고리즘  |  프레임당 추론 시간</a:t>
-            </a:r>
-          </a:p>
-          <a:p>
-            <a:r>
-              <a:rPr sz="1100"/>
-              <a:t>p3  [B·묵시]  범위한정  |  38 ms   →   11 ms</a:t>
-            </a:r>
-          </a:p>
-          <a:p>
-            <a:r>
-              <a:rPr sz="1100"/>
-              <a:t>p3  [B·묵시]  범위한정  |  1개   →   4개</a:t>
-            </a:r>
-          </a:p>
-          <a:p>
-            <a:r>
-              <a:rPr sz="1100"/>
-              <a:t>p3  [B·묵시·⚠공개]  독자성주장  |  캐스케이드 구조와 적응형 임계 방식은 사내 독자 설계이며 현재 논문·특허 등 공개 실적 없음.</a:t>
-            </a:r>
-          </a:p>
-          <a:p>
-            <a:r>
-              <a:rPr sz="1100"/>
-              <a:t>p4  [B·묵시]  방법  |  광학 검사 모듈 및 공정 제어 개선</a:t>
-            </a:r>
-          </a:p>
-          <a:p>
-            <a:r>
-              <a:rPr sz="1100"/>
-              <a:t>p4  [A]  구조  |  450nm 청색광과 660nm 적색광을 200Hz로 교번 점등하고, 파장별 영상을 합성해 표면 결…</a:t>
-            </a:r>
-          </a:p>
-          <a:p>
-            <a:r>
-              <a:rPr sz="1100"/>
-              <a:t>p4  [B·묵시]  범위한정  |  조명 입사각을 22~28° 구간에서 가변한 결과 미세 크랙 대비비가 최대. 24°를 표준 사양으로…</a:t>
-            </a:r>
-          </a:p>
-          <a:p>
-            <a:r>
-              <a:rPr sz="1100"/>
-              <a:t>p4  [B·묵시]  알고리즘  |  코팅 두께 실시간 피드백</a:t>
-            </a:r>
-          </a:p>
-          <a:p>
-            <a:r>
-              <a:rPr sz="1100"/>
-              <a:t>p4  [B·묵시]  범위한정  |  검사 결과를 코터 슬롯다이 제어기에 200ms 주기로 반영하는 폐루프 구성. 두께 편차 ±0.8㎛…</a:t>
-            </a:r>
-          </a:p>
-          <a:p>
-            <a:r>
-              <a:rPr sz="1100"/>
-              <a:t>p4  [B·묵시]  방법  |  모듈 원가 구조 개선</a:t>
-            </a:r>
-          </a:p>
-          <a:p>
-            <a:r>
-              <a:rPr sz="1100"/>
-              <a:t>p4  [A]  구조  |  라인스캔 카메라 4대 구성을 카메라 2대 + 분광 프리즘 구성으로 대체. 광학 모듈 원가 40% …</a:t>
-            </a:r>
-          </a:p>
-          <a:p>
-            <a:r>
-              <a:rPr sz="1100"/>
-              <a:t>p4  [B·묵시]  구조  |  광학 모듈 기준</a:t>
-            </a:r>
-          </a:p>
-          <a:p>
-            <a:r>
-              <a:rPr sz="1100"/>
-              <a:t>p4  [B·묵시]  범위한정  |  기존 ±0.8㎛</a:t>
-            </a:r>
-          </a:p>
-        </p:txBody>
-      </p:sp>
-      <p:sp>
-        <p:nvSpPr>
-          <p:cNvPr id="5" name="TextBox 4"/>
-          <p:cNvSpPr txBox="1"/>
-          <p:nvPr/>
-        </p:nvSpPr>
-        <p:spPr>
-          <a:xfrm>
-            <a:off x="548640" y="6172200"/>
-            <a:ext cx="11094720" cy="274320"/>
-          </a:xfrm>
-          <a:prstGeom prst="rect">
-            <a:avLst/>
-          </a:prstGeom>
-          <a:noFill/>
-        </p:spPr>
-        <p:txBody>
-          <a:bodyPr wrap="none">
-            <a:spAutoFit/>
-          </a:bodyPr>
-          <a:lstStyle/>
-          <a:p>
-            <a:r>
-              <a:rPr sz="900"/>
-              <a:t>자동 스크리닝 결과 · 변리사 검토 전 1차 후보 · 선행기술 조사 및 신규성·진보성 판단 미포함</a:t>
-            </a:r>
-          </a:p>
-        </p:txBody>
-      </p:sp>
-    </p:spTree>
-  </p:cSld>
-  <p:clrMapOvr>
-    <a:masterClrMapping/>
-  </p:clrMapOvr>
-</p:sld>
-</file>
-
-<file path=ppt/slides/slide8.xml><?xml version="1.0" encoding="utf-8"?>
-<p:sld xmlns:a="http://schemas.openxmlformats.org/drawingml/2006/main" xmlns:p="http://schemas.openxmlformats.org/presentationml/2006/main" xmlns:r="http://schemas.openxmlformats.org/officeDocument/2006/relationships">
-  <p:cSld>
-    <p:spTree>
-      <p:nvGrpSpPr>
-        <p:cNvPr id="1" name=""/>
-        <p:cNvGrpSpPr/>
-        <p:nvPr/>
-      </p:nvGrpSpPr>
-      <p:grpSpPr/>
-      <p:sp>
-        <p:nvSpPr>
-          <p:cNvPr id="2" name="TextBox 1"/>
-          <p:cNvSpPr txBox="1"/>
-          <p:nvPr/>
-        </p:nvSpPr>
-        <p:spPr>
-          <a:xfrm>
-            <a:off x="548640" y="411480"/>
-            <a:ext cx="11094720" cy="457200"/>
-          </a:xfrm>
-          <a:prstGeom prst="rect">
-            <a:avLst/>
-          </a:prstGeom>
-          <a:noFill/>
-        </p:spPr>
-        <p:txBody>
-          <a:bodyPr wrap="none">
-            <a:spAutoFit/>
-          </a:bodyPr>
-          <a:lstStyle/>
-          <a:p>
-            <a:r>
-              <a:rPr sz="2400" b="1"/>
-              <a:t>출원 검토 마킹 요약 (3/4)</a:t>
-            </a:r>
-          </a:p>
-        </p:txBody>
-      </p:sp>
-      <p:sp>
-        <p:nvSpPr>
-          <p:cNvPr id="3" name="TextBox 2"/>
-          <p:cNvSpPr txBox="1"/>
-          <p:nvPr/>
-        </p:nvSpPr>
-        <p:spPr>
-          <a:xfrm>
-            <a:off x="548640" y="914400"/>
-            <a:ext cx="11094720" cy="292608"/>
-          </a:xfrm>
-          <a:prstGeom prst="rect">
-            <a:avLst/>
-          </a:prstGeom>
-          <a:noFill/>
-        </p:spPr>
-        <p:txBody>
-          <a:bodyPr wrap="none">
-            <a:spAutoFit/>
-          </a:bodyPr>
-          <a:lstStyle/>
-          <a:p>
-            <a:r>
-              <a:rPr sz="1200"/>
-              <a:t>A(즉시 출원 검토) 6건   ·   B(발명 발굴 필요) 33건   ·   ⚠ 공개 리스크 11건</a:t>
-            </a:r>
-          </a:p>
-        </p:txBody>
-      </p:sp>
-      <p:sp>
-        <p:nvSpPr>
-          <p:cNvPr id="4" name="TextBox 3"/>
-          <p:cNvSpPr txBox="1"/>
-          <p:nvPr/>
-        </p:nvSpPr>
-        <p:spPr>
-          <a:xfrm>
-            <a:off x="548640" y="1325880"/>
-            <a:ext cx="11094720" cy="4754880"/>
-          </a:xfrm>
-          <a:prstGeom prst="rect">
-            <a:avLst/>
-          </a:prstGeom>
-          <a:noFill/>
-        </p:spPr>
-        <p:txBody>
-          <a:bodyPr wrap="square">
-            <a:spAutoFit/>
-          </a:bodyPr>
-          <a:lstStyle/>
-          <a:p>
-            <a:r>
-              <a:rPr sz="1100"/>
-              <a:t>p4  [B·묵시]  범위한정  |  △320mm</a:t>
-            </a:r>
-          </a:p>
-          <a:p>
-            <a:r>
-              <a:rPr sz="1100"/>
-              <a:t>p4  [B·묵시]  효과만기재  |  라인 점유 면적 축소</a:t>
-            </a:r>
-          </a:p>
-          <a:p>
-            <a:r>
-              <a:rPr sz="1100"/>
-              <a:t>p4  [B·묵시]  독자성주장  |  분광 프리즘 배치 구조는 협력사 도면이 아닌 자사 설계이며, 도면 일체를 사내에서 관리 중.</a:t>
-            </a:r>
-          </a:p>
-          <a:p>
-            <a:r>
-              <a:rPr sz="1100"/>
-              <a:t>p5  [B·⚠공개]  공개이력  |  검사 모듈 12조 설치 및 SOP 승인</a:t>
-            </a:r>
-          </a:p>
-          <a:p>
-            <a:r>
-              <a:rPr sz="1100"/>
-              <a:t>p5  [B]  블랙박스용어  |  원통형 46파이 라인 대응</a:t>
-            </a:r>
-          </a:p>
-          <a:p>
-            <a:r>
-              <a:rPr sz="1100"/>
-              <a:t>p5  [B]  블랙박스용어  |  곡면 전극용 광학계 파생 모델 개발</a:t>
-            </a:r>
-          </a:p>
-          <a:p>
-            <a:r>
-              <a:rPr sz="1100"/>
-              <a:t>p5  [B·⚠공개]  공개이력  |  수율 예측 서비스 상용화</a:t>
-            </a:r>
-          </a:p>
-          <a:p>
-            <a:r>
-              <a:rPr sz="1100"/>
-              <a:t>p5  [B]  블랙박스용어  |  누적 검사 데이터 기반 불량 사전 예측</a:t>
-            </a:r>
-          </a:p>
-          <a:p>
-            <a:r>
-              <a:rPr sz="1100"/>
-              <a:t>p5  [B·⚠공개]  공개이력  |  2단계 캐스케이드 검사 공정을 실물 시연, 동작 화면 및 판정 로직 개요가 참관객에게 노출됨</a:t>
-            </a:r>
-          </a:p>
-          <a:p>
-            <a:r>
-              <a:rPr sz="1100"/>
-              <a:t>p5  [B·⚠공개]  블랙박스용어  |  동작 화면 및 판정 로직 개요가 참관객에게 노출됨</a:t>
-            </a:r>
-          </a:p>
-          <a:p>
-            <a:r>
-              <a:rPr sz="1100"/>
-              <a:t>p5  [B·⚠공개]  블랙박스용어  |  다중 파장 교번 조명 방식의 실험 데이터 포함</a:t>
-            </a:r>
-          </a:p>
-          <a:p>
-            <a:r>
-              <a:rPr sz="1100"/>
-              <a:t>p5  [B·⚠공개]  블랙박스용어  |  유사한 다중 파장 조명 검사 방식을 2025. 11 공개특허로 등록 공개한 것으로 확인됨</a:t>
-            </a:r>
-          </a:p>
-          <a:p>
-            <a:r>
-              <a:rPr sz="1100"/>
-              <a:t>p5  [B]  독자성주장  |  자사 명의의 출원 실적이 없으며, 지식재산 담당 부서의 검토가 진행된 바 없음</a:t>
-            </a:r>
-          </a:p>
-        </p:txBody>
-      </p:sp>
-      <p:sp>
-        <p:nvSpPr>
-          <p:cNvPr id="5" name="TextBox 4"/>
-          <p:cNvSpPr txBox="1"/>
-          <p:nvPr/>
-        </p:nvSpPr>
-        <p:spPr>
-          <a:xfrm>
-            <a:off x="548640" y="6172200"/>
-            <a:ext cx="11094720" cy="274320"/>
-          </a:xfrm>
-          <a:prstGeom prst="rect">
-            <a:avLst/>
-          </a:prstGeom>
-          <a:noFill/>
-        </p:spPr>
-        <p:txBody>
-          <a:bodyPr wrap="none">
-            <a:spAutoFit/>
-          </a:bodyPr>
-          <a:lstStyle/>
-          <a:p>
-            <a:r>
-              <a:rPr sz="900"/>
-              <a:t>자동 스크리닝 결과 · 변리사 검토 전 1차 후보 · 선행기술 조사 및 신규성·진보성 판단 미포함</a:t>
-            </a:r>
-          </a:p>
-        </p:txBody>
-      </p:sp>
-    </p:spTree>
-  </p:cSld>
-  <p:clrMapOvr>
-    <a:masterClrMapping/>
-  </p:clrMapOvr>
-</p:sld>
-</file>
-
-<file path=ppt/slides/slide9.xml><?xml version="1.0" encoding="utf-8"?>
-<p:sld xmlns:a="http://schemas.openxmlformats.org/drawingml/2006/main" xmlns:p="http://schemas.openxmlformats.org/presentationml/2006/main" xmlns:r="http://schemas.openxmlformats.org/officeDocument/2006/relationships">
-  <p:cSld>
-    <p:spTree>
-      <p:nvGrpSpPr>
-        <p:cNvPr id="1" name=""/>
-        <p:cNvGrpSpPr/>
-        <p:nvPr/>
-      </p:nvGrpSpPr>
-      <p:grpSpPr/>
-      <p:sp>
-        <p:nvSpPr>
-          <p:cNvPr id="2" name="TextBox 1"/>
-          <p:cNvSpPr txBox="1"/>
-          <p:nvPr/>
-        </p:nvSpPr>
-        <p:spPr>
-          <a:xfrm>
-            <a:off x="548640" y="411480"/>
-            <a:ext cx="11094720" cy="457200"/>
-          </a:xfrm>
-          <a:prstGeom prst="rect">
-            <a:avLst/>
-          </a:prstGeom>
-          <a:noFill/>
-        </p:spPr>
-        <p:txBody>
-          <a:bodyPr wrap="none">
-            <a:spAutoFit/>
-          </a:bodyPr>
-          <a:lstStyle/>
-          <a:p>
-            <a:r>
-              <a:rPr sz="2400" b="1"/>
-              <a:t>출원 검토 마킹 요약 (4/4)</a:t>
-            </a:r>
-          </a:p>
-        </p:txBody>
-      </p:sp>
-      <p:sp>
-        <p:nvSpPr>
-          <p:cNvPr id="3" name="TextBox 2"/>
-          <p:cNvSpPr txBox="1"/>
-          <p:nvPr/>
-        </p:nvSpPr>
-        <p:spPr>
-          <a:xfrm>
-            <a:off x="548640" y="914400"/>
-            <a:ext cx="11094720" cy="292608"/>
-          </a:xfrm>
-          <a:prstGeom prst="rect">
-            <a:avLst/>
-          </a:prstGeom>
-          <a:noFill/>
-        </p:spPr>
-        <p:txBody>
-          <a:bodyPr wrap="none">
-            <a:spAutoFit/>
-          </a:bodyPr>
-          <a:lstStyle/>
-          <a:p>
-            <a:r>
-              <a:rPr sz="1200"/>
-              <a:t>A(즉시 출원 검토) 6건   ·   B(발명 발굴 필요) 33건   ·   ⚠ 공개 리스크 11건</a:t>
-            </a:r>
-          </a:p>
-        </p:txBody>
-      </p:sp>
-      <p:sp>
-        <p:nvSpPr>
-          <p:cNvPr id="4" name="TextBox 3"/>
-          <p:cNvSpPr txBox="1"/>
-          <p:nvPr/>
-        </p:nvSpPr>
-        <p:spPr>
-          <a:xfrm>
-            <a:off x="548640" y="1325880"/>
-            <a:ext cx="11094720" cy="4754880"/>
-          </a:xfrm>
-          <a:prstGeom prst="rect">
-            <a:avLst/>
-          </a:prstGeom>
-          <a:noFill/>
-        </p:spPr>
-        <p:txBody>
-          <a:bodyPr wrap="square">
-            <a:spAutoFit/>
-          </a:bodyPr>
-          <a:lstStyle/>
-          <a:p>
-            <a:r>
-              <a:rPr sz="1100"/>
-              <a:t>p5  [B·⚠공개]  공개이력  |  학회 발표는 초록 제출 시점부터 공개로 간주될 수 있으므로, 출원 시점을 8월 중으로 앞당길 필요…</a:t>
-            </a:r>
-          </a:p>
-        </p:txBody>
-      </p:sp>
-      <p:sp>
-        <p:nvSpPr>
-          <p:cNvPr id="5" name="TextBox 4"/>
-          <p:cNvSpPr txBox="1"/>
-          <p:nvPr/>
-        </p:nvSpPr>
-        <p:spPr>
-          <a:xfrm>
-            <a:off x="548640" y="6172200"/>
-            <a:ext cx="11094720" cy="274320"/>
-          </a:xfrm>
-          <a:prstGeom prst="rect">
-            <a:avLst/>
-          </a:prstGeom>
-          <a:noFill/>
-        </p:spPr>
-        <p:txBody>
-          <a:bodyPr wrap="none">
-            <a:spAutoFit/>
-          </a:bodyPr>
-          <a:lstStyle/>
-          <a:p>
-            <a:r>
-              <a:rPr sz="900"/>
-              <a:t>자동 스크리닝 결과 · 변리사 검토 전 1차 후보 · 선행기술 조사 및 신규성·진보성 판단 미포함</a:t>
-            </a:r>
           </a:p>
         </p:txBody>
       </p:sp>

--- a/samples/회사보고자료_예시_마킹결과.pptx
+++ b/samples/회사보고자료_예시_마킹결과.pptx
@@ -2326,11 +2326,11 @@
                   <a:srgbClr val="141A22"/>
                 </a:solidFill>
                 <a:highlight>
-                  <a:srgbClr val="9FD8F5"/>
+                  <a:srgbClr val="00FFFF"/>
                 </a:highlight>
                 <a:uFill>
                   <a:solidFill>
-                    <a:srgbClr val="9FD8F5"/>
+                    <a:srgbClr val="00FFFF"/>
                   </a:solidFill>
                 </a:uFill>
                 <a:latin typeface="Malgun Gothic" pitchFamily="34" charset="0"/>
@@ -2442,11 +2442,11 @@
                   <a:srgbClr val="141A22"/>
                 </a:solidFill>
                 <a:highlight>
-                  <a:srgbClr val="FFD54F"/>
+                  <a:srgbClr val="FFFF00"/>
                 </a:highlight>
                 <a:uFill>
                   <a:solidFill>
-                    <a:srgbClr val="FFD54F"/>
+                    <a:srgbClr val="FFFF00"/>
                   </a:solidFill>
                 </a:uFill>
               </a:rPr>
@@ -2469,11 +2469,11 @@
                   <a:srgbClr val="141A22"/>
                 </a:solidFill>
                 <a:highlight>
-                  <a:srgbClr val="9FD8F5"/>
+                  <a:srgbClr val="00FFFF"/>
                 </a:highlight>
                 <a:uFill>
                   <a:solidFill>
-                    <a:srgbClr val="9FD8F5"/>
+                    <a:srgbClr val="00FFFF"/>
                   </a:solidFill>
                 </a:uFill>
               </a:rPr>
@@ -2496,11 +2496,11 @@
                   <a:srgbClr val="141A22"/>
                 </a:solidFill>
                 <a:highlight>
-                  <a:srgbClr val="FF9E80"/>
+                  <a:srgbClr val="FF5050"/>
                 </a:highlight>
                 <a:uFill>
                   <a:solidFill>
-                    <a:srgbClr val="FF9E80"/>
+                    <a:srgbClr val="FF5050"/>
                   </a:solidFill>
                 </a:uFill>
               </a:rPr>
@@ -2813,11 +2813,11 @@
                   <a:srgbClr val="1A2233"/>
                 </a:solidFill>
                 <a:highlight>
-                  <a:srgbClr val="9FD8F5"/>
+                  <a:srgbClr val="00FFFF"/>
                 </a:highlight>
                 <a:uFill>
                   <a:solidFill>
-                    <a:srgbClr val="9FD8F5"/>
+                    <a:srgbClr val="00FFFF"/>
                   </a:solidFill>
                 </a:uFill>
                 <a:latin typeface="Malgun Gothic" pitchFamily="34" charset="0"/>
@@ -2989,11 +2989,11 @@
                   <a:srgbClr val="1A2233"/>
                 </a:solidFill>
                 <a:highlight>
-                  <a:srgbClr val="FF9E80"/>
+                  <a:srgbClr val="FF5050"/>
                 </a:highlight>
                 <a:uFill>
                   <a:solidFill>
-                    <a:srgbClr val="FF9E80"/>
+                    <a:srgbClr val="FF5050"/>
                   </a:solidFill>
                 </a:uFill>
                 <a:latin typeface="Malgun Gothic" pitchFamily="34" charset="0"/>
@@ -3019,11 +3019,11 @@
                   <a:srgbClr val="1A2233"/>
                 </a:solidFill>
                 <a:highlight>
-                  <a:srgbClr val="FF9E80"/>
+                  <a:srgbClr val="FF5050"/>
                 </a:highlight>
                 <a:uFill>
                   <a:solidFill>
-                    <a:srgbClr val="FF9E80"/>
+                    <a:srgbClr val="FF5050"/>
                   </a:solidFill>
                 </a:uFill>
                 <a:latin typeface="Malgun Gothic" pitchFamily="34" charset="0"/>
@@ -3398,11 +3398,11 @@
                   <a:srgbClr val="12203F"/>
                 </a:solidFill>
                 <a:highlight>
-                  <a:srgbClr val="9FD8F5"/>
+                  <a:srgbClr val="00FFFF"/>
                 </a:highlight>
                 <a:uFill>
                   <a:solidFill>
-                    <a:srgbClr val="9FD8F5"/>
+                    <a:srgbClr val="00FFFF"/>
                   </a:solidFill>
                 </a:uFill>
                 <a:latin typeface="Malgun Gothic" pitchFamily="34" charset="0"/>
@@ -3456,11 +3456,11 @@
                   <a:srgbClr val="6B7891"/>
                 </a:solidFill>
                 <a:highlight>
-                  <a:srgbClr val="FFD54F"/>
+                  <a:srgbClr val="FFFF00"/>
                 </a:highlight>
                 <a:uFill>
                   <a:solidFill>
-                    <a:srgbClr val="FFD54F"/>
+                    <a:srgbClr val="FFFF00"/>
                   </a:solidFill>
                 </a:uFill>
                 <a:latin typeface="Malgun Gothic" pitchFamily="34" charset="0"/>
@@ -4209,11 +4209,11 @@
                   <a:srgbClr val="1A2233"/>
                 </a:solidFill>
                 <a:highlight>
-                  <a:srgbClr val="FFD54F"/>
+                  <a:srgbClr val="FFFF00"/>
                 </a:highlight>
                 <a:uFill>
                   <a:solidFill>
-                    <a:srgbClr val="FFD54F"/>
+                    <a:srgbClr val="FFFF00"/>
                   </a:solidFill>
                 </a:uFill>
                 <a:latin typeface="Malgun Gothic" pitchFamily="34" charset="0"/>
@@ -4241,11 +4241,11 @@
                   <a:srgbClr val="1A2233"/>
                 </a:solidFill>
                 <a:highlight>
-                  <a:srgbClr val="FFD54F"/>
+                  <a:srgbClr val="FFFF00"/>
                 </a:highlight>
                 <a:uFill>
                   <a:solidFill>
-                    <a:srgbClr val="FFD54F"/>
+                    <a:srgbClr val="FFFF00"/>
                   </a:solidFill>
                 </a:uFill>
                 <a:latin typeface="Malgun Gothic" pitchFamily="34" charset="0"/>
@@ -4273,11 +4273,11 @@
                   <a:srgbClr val="1A2233"/>
                 </a:solidFill>
                 <a:highlight>
-                  <a:srgbClr val="9FD8F5"/>
+                  <a:srgbClr val="00FFFF"/>
                 </a:highlight>
                 <a:uFill>
                   <a:solidFill>
-                    <a:srgbClr val="9FD8F5"/>
+                    <a:srgbClr val="00FFFF"/>
                   </a:solidFill>
                 </a:uFill>
                 <a:latin typeface="Malgun Gothic" pitchFamily="34" charset="0"/>
@@ -4305,11 +4305,11 @@
                   <a:srgbClr val="1A2233"/>
                 </a:solidFill>
                 <a:highlight>
-                  <a:srgbClr val="FFD54F"/>
+                  <a:srgbClr val="FFFF00"/>
                 </a:highlight>
                 <a:uFill>
                   <a:solidFill>
-                    <a:srgbClr val="FFD54F"/>
+                    <a:srgbClr val="FFFF00"/>
                   </a:solidFill>
                 </a:uFill>
                 <a:latin typeface="Malgun Gothic" pitchFamily="34" charset="0"/>
@@ -4456,11 +4456,11 @@
                   <a:srgbClr val="6B7891"/>
                 </a:solidFill>
                 <a:highlight>
-                  <a:srgbClr val="9FD8F5"/>
+                  <a:srgbClr val="00FFFF"/>
                 </a:highlight>
                 <a:uFill>
                   <a:solidFill>
-                    <a:srgbClr val="9FD8F5"/>
+                    <a:srgbClr val="00FFFF"/>
                   </a:solidFill>
                 </a:uFill>
                 <a:latin typeface="Malgun Gothic" pitchFamily="34" charset="0"/>
@@ -4478,11 +4478,11 @@
                   <a:srgbClr val="6B7891"/>
                 </a:solidFill>
                 <a:highlight>
-                  <a:srgbClr val="9FD8F5"/>
+                  <a:srgbClr val="00FFFF"/>
                 </a:highlight>
                 <a:uFill>
                   <a:solidFill>
-                    <a:srgbClr val="9FD8F5"/>
+                    <a:srgbClr val="00FFFF"/>
                   </a:solidFill>
                 </a:uFill>
                 <a:latin typeface="Malgun Gothic" pitchFamily="34" charset="0"/>
@@ -4500,11 +4500,11 @@
                   <a:srgbClr val="12203F"/>
                 </a:solidFill>
                 <a:highlight>
-                  <a:srgbClr val="9FD8F5"/>
+                  <a:srgbClr val="00FFFF"/>
                 </a:highlight>
                 <a:uFill>
                   <a:solidFill>
-                    <a:srgbClr val="9FD8F5"/>
+                    <a:srgbClr val="00FFFF"/>
                   </a:solidFill>
                 </a:uFill>
                 <a:latin typeface="Malgun Gothic" pitchFamily="34" charset="0"/>
@@ -4573,11 +4573,11 @@
                   <a:srgbClr val="1A2233"/>
                 </a:solidFill>
                 <a:highlight>
-                  <a:srgbClr val="9FD8F5"/>
+                  <a:srgbClr val="00FFFF"/>
                 </a:highlight>
                 <a:uFill>
                   <a:solidFill>
-                    <a:srgbClr val="9FD8F5"/>
+                    <a:srgbClr val="00FFFF"/>
                   </a:solidFill>
                 </a:uFill>
                 <a:latin typeface="Malgun Gothic" pitchFamily="34" charset="0"/>
@@ -4620,11 +4620,11 @@
                   <a:srgbClr val="6B7891"/>
                 </a:solidFill>
                 <a:highlight>
-                  <a:srgbClr val="9FD8F5"/>
+                  <a:srgbClr val="00FFFF"/>
                 </a:highlight>
                 <a:uFill>
                   <a:solidFill>
-                    <a:srgbClr val="9FD8F5"/>
+                    <a:srgbClr val="00FFFF"/>
                   </a:solidFill>
                 </a:uFill>
                 <a:latin typeface="Malgun Gothic" pitchFamily="34" charset="0"/>
@@ -4642,11 +4642,11 @@
                   <a:srgbClr val="6B7891"/>
                 </a:solidFill>
                 <a:highlight>
-                  <a:srgbClr val="9FD8F5"/>
+                  <a:srgbClr val="00FFFF"/>
                 </a:highlight>
                 <a:uFill>
                   <a:solidFill>
-                    <a:srgbClr val="9FD8F5"/>
+                    <a:srgbClr val="00FFFF"/>
                   </a:solidFill>
                 </a:uFill>
                 <a:latin typeface="Malgun Gothic" pitchFamily="34" charset="0"/>
@@ -4664,11 +4664,11 @@
                   <a:srgbClr val="12203F"/>
                 </a:solidFill>
                 <a:highlight>
-                  <a:srgbClr val="9FD8F5"/>
+                  <a:srgbClr val="00FFFF"/>
                 </a:highlight>
                 <a:uFill>
                   <a:solidFill>
-                    <a:srgbClr val="9FD8F5"/>
+                    <a:srgbClr val="00FFFF"/>
                   </a:solidFill>
                 </a:uFill>
                 <a:latin typeface="Malgun Gothic" pitchFamily="34" charset="0"/>
@@ -4776,11 +4776,11 @@
                   <a:srgbClr val="6B7891"/>
                 </a:solidFill>
                 <a:highlight>
-                  <a:srgbClr val="9FD8F5"/>
+                  <a:srgbClr val="00FFFF"/>
                 </a:highlight>
                 <a:uFill>
                   <a:solidFill>
-                    <a:srgbClr val="9FD8F5"/>
+                    <a:srgbClr val="00FFFF"/>
                   </a:solidFill>
                 </a:uFill>
                 <a:latin typeface="Malgun Gothic" pitchFamily="34" charset="0"/>
@@ -4798,11 +4798,11 @@
                   <a:srgbClr val="6B7891"/>
                 </a:solidFill>
                 <a:highlight>
-                  <a:srgbClr val="9FD8F5"/>
+                  <a:srgbClr val="00FFFF"/>
                 </a:highlight>
                 <a:uFill>
                   <a:solidFill>
-                    <a:srgbClr val="9FD8F5"/>
+                    <a:srgbClr val="00FFFF"/>
                   </a:solidFill>
                 </a:uFill>
                 <a:latin typeface="Malgun Gothic" pitchFamily="34" charset="0"/>
@@ -4820,11 +4820,11 @@
                   <a:srgbClr val="12203F"/>
                 </a:solidFill>
                 <a:highlight>
-                  <a:srgbClr val="9FD8F5"/>
+                  <a:srgbClr val="00FFFF"/>
                 </a:highlight>
                 <a:uFill>
                   <a:solidFill>
-                    <a:srgbClr val="9FD8F5"/>
+                    <a:srgbClr val="00FFFF"/>
                   </a:solidFill>
                 </a:uFill>
                 <a:latin typeface="Malgun Gothic" pitchFamily="34" charset="0"/>
@@ -5042,11 +5042,11 @@
                   <a:srgbClr val="12203F"/>
                 </a:solidFill>
                 <a:highlight>
-                  <a:srgbClr val="9FD8F5"/>
+                  <a:srgbClr val="00FFFF"/>
                 </a:highlight>
                 <a:uFill>
                   <a:solidFill>
-                    <a:srgbClr val="9FD8F5"/>
+                    <a:srgbClr val="00FFFF"/>
                   </a:solidFill>
                 </a:uFill>
                 <a:latin typeface="Malgun Gothic" pitchFamily="34" charset="0"/>
@@ -5227,11 +5227,11 @@
                   <a:srgbClr val="1A2233"/>
                 </a:solidFill>
                 <a:highlight>
-                  <a:srgbClr val="FFD54F"/>
+                  <a:srgbClr val="FFFF00"/>
                 </a:highlight>
                 <a:uFill>
                   <a:solidFill>
-                    <a:srgbClr val="FFD54F"/>
+                    <a:srgbClr val="FFFF00"/>
                   </a:solidFill>
                 </a:uFill>
                 <a:latin typeface="Malgun Gothic" pitchFamily="34" charset="0"/>
@@ -5412,11 +5412,11 @@
                   <a:srgbClr val="1A2233"/>
                 </a:solidFill>
                 <a:highlight>
-                  <a:srgbClr val="9FD8F5"/>
+                  <a:srgbClr val="00FFFF"/>
                 </a:highlight>
                 <a:uFill>
                   <a:solidFill>
-                    <a:srgbClr val="9FD8F5"/>
+                    <a:srgbClr val="00FFFF"/>
                   </a:solidFill>
                 </a:uFill>
                 <a:latin typeface="Malgun Gothic" pitchFamily="34" charset="0"/>
@@ -5555,11 +5555,11 @@
                   <a:srgbClr val="12203F"/>
                 </a:solidFill>
                 <a:highlight>
-                  <a:srgbClr val="9FD8F5"/>
+                  <a:srgbClr val="00FFFF"/>
                 </a:highlight>
                 <a:uFill>
                   <a:solidFill>
-                    <a:srgbClr val="9FD8F5"/>
+                    <a:srgbClr val="00FFFF"/>
                   </a:solidFill>
                 </a:uFill>
                 <a:latin typeface="Malgun Gothic" pitchFamily="34" charset="0"/>
@@ -5605,11 +5605,11 @@
                   <a:srgbClr val="1A2233"/>
                 </a:solidFill>
                 <a:highlight>
-                  <a:srgbClr val="9FD8F5"/>
+                  <a:srgbClr val="00FFFF"/>
                 </a:highlight>
                 <a:uFill>
                   <a:solidFill>
-                    <a:srgbClr val="9FD8F5"/>
+                    <a:srgbClr val="00FFFF"/>
                   </a:solidFill>
                 </a:uFill>
                 <a:latin typeface="Malgun Gothic" pitchFamily="34" charset="0"/>
@@ -5748,11 +5748,11 @@
                   <a:srgbClr val="12203F"/>
                 </a:solidFill>
                 <a:highlight>
-                  <a:srgbClr val="9FD8F5"/>
+                  <a:srgbClr val="00FFFF"/>
                 </a:highlight>
                 <a:uFill>
                   <a:solidFill>
-                    <a:srgbClr val="9FD8F5"/>
+                    <a:srgbClr val="00FFFF"/>
                   </a:solidFill>
                 </a:uFill>
                 <a:latin typeface="Malgun Gothic" pitchFamily="34" charset="0"/>
@@ -5798,11 +5798,11 @@
                   <a:srgbClr val="1A2233"/>
                 </a:solidFill>
                 <a:highlight>
-                  <a:srgbClr val="FFD54F"/>
+                  <a:srgbClr val="FFFF00"/>
                 </a:highlight>
                 <a:uFill>
                   <a:solidFill>
-                    <a:srgbClr val="FFD54F"/>
+                    <a:srgbClr val="FFFF00"/>
                   </a:solidFill>
                 </a:uFill>
                 <a:latin typeface="Malgun Gothic" pitchFamily="34" charset="0"/>
@@ -5949,11 +5949,11 @@
                   <a:srgbClr val="141A22"/>
                 </a:solidFill>
                 <a:highlight>
-                  <a:srgbClr val="9FD8F5"/>
+                  <a:srgbClr val="00FFFF"/>
                 </a:highlight>
                 <a:uFill>
                   <a:solidFill>
-                    <a:srgbClr val="9FD8F5"/>
+                    <a:srgbClr val="00FFFF"/>
                   </a:solidFill>
                 </a:uFill>
                 <a:latin typeface="Malgun Gothic" pitchFamily="34" charset="0"/>
@@ -6074,11 +6074,11 @@
                   <a:srgbClr val="141A22"/>
                 </a:solidFill>
                 <a:highlight>
-                  <a:srgbClr val="9FD8F5"/>
+                  <a:srgbClr val="00FFFF"/>
                 </a:highlight>
                 <a:uFill>
                   <a:solidFill>
-                    <a:srgbClr val="9FD8F5"/>
+                    <a:srgbClr val="00FFFF"/>
                   </a:solidFill>
                 </a:uFill>
                 <a:latin typeface="Malgun Gothic" pitchFamily="34" charset="0"/>
@@ -6160,11 +6160,11 @@
                   <a:srgbClr val="00C2A8"/>
                 </a:solidFill>
                 <a:highlight>
-                  <a:srgbClr val="9FD8F5"/>
+                  <a:srgbClr val="00FFFF"/>
                 </a:highlight>
                 <a:uFill>
                   <a:solidFill>
-                    <a:srgbClr val="9FD8F5"/>
+                    <a:srgbClr val="00FFFF"/>
                   </a:solidFill>
                 </a:uFill>
                 <a:latin typeface="Malgun Gothic" pitchFamily="34" charset="0"/>
@@ -6207,11 +6207,11 @@
                   <a:srgbClr val="141A22"/>
                 </a:solidFill>
                 <a:highlight>
-                  <a:srgbClr val="9FD8F5"/>
+                  <a:srgbClr val="00FFFF"/>
                 </a:highlight>
                 <a:uFill>
                   <a:solidFill>
-                    <a:srgbClr val="9FD8F5"/>
+                    <a:srgbClr val="00FFFF"/>
                   </a:solidFill>
                 </a:uFill>
                 <a:latin typeface="Malgun Gothic" pitchFamily="34" charset="0"/>
@@ -6666,11 +6666,11 @@
                   <a:srgbClr val="141A22"/>
                 </a:solidFill>
                 <a:highlight>
-                  <a:srgbClr val="FF9E80"/>
+                  <a:srgbClr val="FF5050"/>
                 </a:highlight>
                 <a:uFill>
                   <a:solidFill>
-                    <a:srgbClr val="FF9E80"/>
+                    <a:srgbClr val="FF5050"/>
                   </a:solidFill>
                 </a:uFill>
                 <a:latin typeface="Malgun Gothic" pitchFamily="34" charset="0"/>
@@ -6778,11 +6778,11 @@
                   <a:srgbClr val="141A22"/>
                 </a:solidFill>
                 <a:highlight>
-                  <a:srgbClr val="9FD8F5"/>
+                  <a:srgbClr val="00FFFF"/>
                 </a:highlight>
                 <a:uFill>
                   <a:solidFill>
-                    <a:srgbClr val="9FD8F5"/>
+                    <a:srgbClr val="00FFFF"/>
                   </a:solidFill>
                 </a:uFill>
                 <a:latin typeface="Malgun Gothic" pitchFamily="34" charset="0"/>
@@ -6828,11 +6828,11 @@
                   <a:srgbClr val="141A22"/>
                 </a:solidFill>
                 <a:highlight>
-                  <a:srgbClr val="9FD8F5"/>
+                  <a:srgbClr val="00FFFF"/>
                 </a:highlight>
                 <a:uFill>
                   <a:solidFill>
-                    <a:srgbClr val="9FD8F5"/>
+                    <a:srgbClr val="00FFFF"/>
                   </a:solidFill>
                 </a:uFill>
                 <a:latin typeface="Malgun Gothic" pitchFamily="34" charset="0"/>
@@ -6940,11 +6940,11 @@
                   <a:srgbClr val="141A22"/>
                 </a:solidFill>
                 <a:highlight>
-                  <a:srgbClr val="FF9E80"/>
+                  <a:srgbClr val="FF5050"/>
                 </a:highlight>
                 <a:uFill>
                   <a:solidFill>
-                    <a:srgbClr val="FF9E80"/>
+                    <a:srgbClr val="FF5050"/>
                   </a:solidFill>
                 </a:uFill>
                 <a:latin typeface="Malgun Gothic" pitchFamily="34" charset="0"/>
@@ -6990,11 +6990,11 @@
                   <a:srgbClr val="141A22"/>
                 </a:solidFill>
                 <a:highlight>
-                  <a:srgbClr val="9FD8F5"/>
+                  <a:srgbClr val="00FFFF"/>
                 </a:highlight>
                 <a:uFill>
                   <a:solidFill>
-                    <a:srgbClr val="9FD8F5"/>
+                    <a:srgbClr val="00FFFF"/>
                   </a:solidFill>
                 </a:uFill>
                 <a:latin typeface="Malgun Gothic" pitchFamily="34" charset="0"/>
@@ -7125,11 +7125,11 @@
                   <a:srgbClr val="141A22"/>
                 </a:solidFill>
                 <a:highlight>
-                  <a:srgbClr val="FF9E80"/>
+                  <a:srgbClr val="FF5050"/>
                 </a:highlight>
                 <a:uFill>
                   <a:solidFill>
-                    <a:srgbClr val="FF9E80"/>
+                    <a:srgbClr val="FF5050"/>
                   </a:solidFill>
                 </a:uFill>
                 <a:latin typeface="Malgun Gothic" pitchFamily="34" charset="0"/>
@@ -7168,11 +7168,11 @@
                   <a:srgbClr val="141A22"/>
                 </a:solidFill>
                 <a:highlight>
-                  <a:srgbClr val="FF9E80"/>
+                  <a:srgbClr val="FF5050"/>
                 </a:highlight>
                 <a:uFill>
                   <a:solidFill>
-                    <a:srgbClr val="FF9E80"/>
+                    <a:srgbClr val="FF5050"/>
                   </a:solidFill>
                 </a:uFill>
                 <a:latin typeface="Malgun Gothic" pitchFamily="34" charset="0"/>
@@ -7211,11 +7211,11 @@
                   <a:srgbClr val="141A22"/>
                 </a:solidFill>
                 <a:highlight>
-                  <a:srgbClr val="FF9E80"/>
+                  <a:srgbClr val="FF5050"/>
                 </a:highlight>
                 <a:uFill>
                   <a:solidFill>
-                    <a:srgbClr val="FF9E80"/>
+                    <a:srgbClr val="FF5050"/>
                   </a:solidFill>
                 </a:uFill>
                 <a:latin typeface="Malgun Gothic" pitchFamily="34" charset="0"/>
@@ -7254,11 +7254,11 @@
                   <a:srgbClr val="141A22"/>
                 </a:solidFill>
                 <a:highlight>
-                  <a:srgbClr val="9FD8F5"/>
+                  <a:srgbClr val="00FFFF"/>
                 </a:highlight>
                 <a:uFill>
                   <a:solidFill>
-                    <a:srgbClr val="9FD8F5"/>
+                    <a:srgbClr val="00FFFF"/>
                   </a:solidFill>
                 </a:uFill>
                 <a:latin typeface="Malgun Gothic" pitchFamily="34" charset="0"/>
